--- a/仕様書/シーン.pptx
+++ b/仕様書/シーン.pptx
@@ -8,9 +8,9 @@
     <p:sldId id="256" r:id="rId2"/>
     <p:sldId id="257" r:id="rId3"/>
     <p:sldId id="258" r:id="rId4"/>
-    <p:sldId id="259" r:id="rId5"/>
-    <p:sldId id="262" r:id="rId6"/>
-    <p:sldId id="260" r:id="rId7"/>
+    <p:sldId id="260" r:id="rId5"/>
+    <p:sldId id="259" r:id="rId6"/>
+    <p:sldId id="262" r:id="rId7"/>
     <p:sldId id="261" r:id="rId8"/>
     <p:sldId id="263" r:id="rId9"/>
     <p:sldId id="264" r:id="rId10"/>
@@ -120,7 +120,7 @@
   <pc:docChgLst>
     <pc:chgData name="黒沢　爽次" userId="fae486ef-0c84-45a4-a237-2d2b758b0e89" providerId="ADAL" clId="{64A8C56E-7B60-49D6-AD88-22DC8C2BC8B6}"/>
     <pc:docChg chg="undo custSel addSld modSld sldOrd">
-      <pc:chgData name="黒沢　爽次" userId="fae486ef-0c84-45a4-a237-2d2b758b0e89" providerId="ADAL" clId="{64A8C56E-7B60-49D6-AD88-22DC8C2BC8B6}" dt="2026-06-02T03:42:48.119" v="472"/>
+      <pc:chgData name="黒沢　爽次" userId="fae486ef-0c84-45a4-a237-2d2b758b0e89" providerId="ADAL" clId="{64A8C56E-7B60-49D6-AD88-22DC8C2BC8B6}" dt="2026-06-02T06:22:49.414" v="671" actId="20577"/>
       <pc:docMkLst>
         <pc:docMk/>
       </pc:docMkLst>
@@ -180,7 +180,7 @@
         </pc:spChg>
       </pc:sldChg>
       <pc:sldChg chg="addSp delSp modSp new mod">
-        <pc:chgData name="黒沢　爽次" userId="fae486ef-0c84-45a4-a237-2d2b758b0e89" providerId="ADAL" clId="{64A8C56E-7B60-49D6-AD88-22DC8C2BC8B6}" dt="2026-06-02T03:42:41.832" v="466"/>
+        <pc:chgData name="黒沢　爽次" userId="fae486ef-0c84-45a4-a237-2d2b758b0e89" providerId="ADAL" clId="{64A8C56E-7B60-49D6-AD88-22DC8C2BC8B6}" dt="2026-06-02T04:38:45.863" v="616" actId="20577"/>
         <pc:sldMkLst>
           <pc:docMk/>
           <pc:sldMk cId="3471022167" sldId="257"/>
@@ -217,9 +217,25 @@
             <ac:spMk id="5" creationId="{CDE0AE0A-B76C-4D15-AE15-92C4D7FAD2F2}"/>
           </ac:spMkLst>
         </pc:spChg>
+        <pc:spChg chg="add mod">
+          <ac:chgData name="黒沢　爽次" userId="fae486ef-0c84-45a4-a237-2d2b758b0e89" providerId="ADAL" clId="{64A8C56E-7B60-49D6-AD88-22DC8C2BC8B6}" dt="2026-06-02T04:38:22.935" v="598" actId="1076"/>
+          <ac:spMkLst>
+            <pc:docMk/>
+            <pc:sldMk cId="3471022167" sldId="257"/>
+            <ac:spMk id="6" creationId="{5B50C9F1-A984-4A58-B5BF-A43A00475759}"/>
+          </ac:spMkLst>
+        </pc:spChg>
+        <pc:spChg chg="add mod">
+          <ac:chgData name="黒沢　爽次" userId="fae486ef-0c84-45a4-a237-2d2b758b0e89" providerId="ADAL" clId="{64A8C56E-7B60-49D6-AD88-22DC8C2BC8B6}" dt="2026-06-02T04:38:45.863" v="616" actId="20577"/>
+          <ac:spMkLst>
+            <pc:docMk/>
+            <pc:sldMk cId="3471022167" sldId="257"/>
+            <ac:spMk id="7" creationId="{93FE237F-0A19-4239-9601-E81C8488FA25}"/>
+          </ac:spMkLst>
+        </pc:spChg>
       </pc:sldChg>
       <pc:sldChg chg="addSp delSp modSp new mod">
-        <pc:chgData name="黒沢　爽次" userId="fae486ef-0c84-45a4-a237-2d2b758b0e89" providerId="ADAL" clId="{64A8C56E-7B60-49D6-AD88-22DC8C2BC8B6}" dt="2026-06-02T03:42:28.093" v="465" actId="1076"/>
+        <pc:chgData name="黒沢　爽次" userId="fae486ef-0c84-45a4-a237-2d2b758b0e89" providerId="ADAL" clId="{64A8C56E-7B60-49D6-AD88-22DC8C2BC8B6}" dt="2026-06-02T04:37:53.860" v="587" actId="6549"/>
         <pc:sldMkLst>
           <pc:docMk/>
           <pc:sldMk cId="2222033658" sldId="258"/>
@@ -241,7 +257,7 @@
           </ac:spMkLst>
         </pc:spChg>
         <pc:spChg chg="add mod">
-          <ac:chgData name="黒沢　爽次" userId="fae486ef-0c84-45a4-a237-2d2b758b0e89" providerId="ADAL" clId="{64A8C56E-7B60-49D6-AD88-22DC8C2BC8B6}" dt="2026-06-02T03:33:53.643" v="245" actId="20577"/>
+          <ac:chgData name="黒沢　爽次" userId="fae486ef-0c84-45a4-a237-2d2b758b0e89" providerId="ADAL" clId="{64A8C56E-7B60-49D6-AD88-22DC8C2BC8B6}" dt="2026-06-02T04:34:55.245" v="473" actId="1076"/>
           <ac:spMkLst>
             <pc:docMk/>
             <pc:sldMk cId="2222033658" sldId="258"/>
@@ -249,7 +265,7 @@
           </ac:spMkLst>
         </pc:spChg>
         <pc:spChg chg="add mod">
-          <ac:chgData name="黒沢　爽次" userId="fae486ef-0c84-45a4-a237-2d2b758b0e89" providerId="ADAL" clId="{64A8C56E-7B60-49D6-AD88-22DC8C2BC8B6}" dt="2026-06-02T03:36:00.767" v="308" actId="14100"/>
+          <ac:chgData name="黒沢　爽次" userId="fae486ef-0c84-45a4-a237-2d2b758b0e89" providerId="ADAL" clId="{64A8C56E-7B60-49D6-AD88-22DC8C2BC8B6}" dt="2026-06-02T04:34:55.245" v="473" actId="1076"/>
           <ac:spMkLst>
             <pc:docMk/>
             <pc:sldMk cId="2222033658" sldId="258"/>
@@ -257,7 +273,7 @@
           </ac:spMkLst>
         </pc:spChg>
         <pc:spChg chg="add mod">
-          <ac:chgData name="黒沢　爽次" userId="fae486ef-0c84-45a4-a237-2d2b758b0e89" providerId="ADAL" clId="{64A8C56E-7B60-49D6-AD88-22DC8C2BC8B6}" dt="2026-06-02T03:42:28.093" v="465" actId="1076"/>
+          <ac:chgData name="黒沢　爽次" userId="fae486ef-0c84-45a4-a237-2d2b758b0e89" providerId="ADAL" clId="{64A8C56E-7B60-49D6-AD88-22DC8C2BC8B6}" dt="2026-06-02T04:34:55.245" v="473" actId="1076"/>
           <ac:spMkLst>
             <pc:docMk/>
             <pc:sldMk cId="2222033658" sldId="258"/>
@@ -265,7 +281,7 @@
           </ac:spMkLst>
         </pc:spChg>
         <pc:spChg chg="add mod">
-          <ac:chgData name="黒沢　爽次" userId="fae486ef-0c84-45a4-a237-2d2b758b0e89" providerId="ADAL" clId="{64A8C56E-7B60-49D6-AD88-22DC8C2BC8B6}" dt="2026-06-02T03:38:32.463" v="367" actId="1076"/>
+          <ac:chgData name="黒沢　爽次" userId="fae486ef-0c84-45a4-a237-2d2b758b0e89" providerId="ADAL" clId="{64A8C56E-7B60-49D6-AD88-22DC8C2BC8B6}" dt="2026-06-02T04:34:55.245" v="473" actId="1076"/>
           <ac:spMkLst>
             <pc:docMk/>
             <pc:sldMk cId="2222033658" sldId="258"/>
@@ -281,7 +297,7 @@
           </ac:spMkLst>
         </pc:spChg>
         <pc:spChg chg="add mod">
-          <ac:chgData name="黒沢　爽次" userId="fae486ef-0c84-45a4-a237-2d2b758b0e89" providerId="ADAL" clId="{64A8C56E-7B60-49D6-AD88-22DC8C2BC8B6}" dt="2026-06-02T03:40:55.364" v="409" actId="14100"/>
+          <ac:chgData name="黒沢　爽次" userId="fae486ef-0c84-45a4-a237-2d2b758b0e89" providerId="ADAL" clId="{64A8C56E-7B60-49D6-AD88-22DC8C2BC8B6}" dt="2026-06-02T04:34:55.245" v="473" actId="1076"/>
           <ac:spMkLst>
             <pc:docMk/>
             <pc:sldMk cId="2222033658" sldId="258"/>
@@ -289,7 +305,7 @@
           </ac:spMkLst>
         </pc:spChg>
         <pc:spChg chg="add mod">
-          <ac:chgData name="黒沢　爽次" userId="fae486ef-0c84-45a4-a237-2d2b758b0e89" providerId="ADAL" clId="{64A8C56E-7B60-49D6-AD88-22DC8C2BC8B6}" dt="2026-06-02T03:39:02.730" v="385" actId="1076"/>
+          <ac:chgData name="黒沢　爽次" userId="fae486ef-0c84-45a4-a237-2d2b758b0e89" providerId="ADAL" clId="{64A8C56E-7B60-49D6-AD88-22DC8C2BC8B6}" dt="2026-06-02T04:34:55.245" v="473" actId="1076"/>
           <ac:spMkLst>
             <pc:docMk/>
             <pc:sldMk cId="2222033658" sldId="258"/>
@@ -297,7 +313,7 @@
           </ac:spMkLst>
         </pc:spChg>
         <pc:spChg chg="add mod">
-          <ac:chgData name="黒沢　爽次" userId="fae486ef-0c84-45a4-a237-2d2b758b0e89" providerId="ADAL" clId="{64A8C56E-7B60-49D6-AD88-22DC8C2BC8B6}" dt="2026-06-02T03:39:45.368" v="407" actId="20577"/>
+          <ac:chgData name="黒沢　爽次" userId="fae486ef-0c84-45a4-a237-2d2b758b0e89" providerId="ADAL" clId="{64A8C56E-7B60-49D6-AD88-22DC8C2BC8B6}" dt="2026-06-02T04:34:55.245" v="473" actId="1076"/>
           <ac:spMkLst>
             <pc:docMk/>
             <pc:sldMk cId="2222033658" sldId="258"/>
@@ -305,7 +321,7 @@
           </ac:spMkLst>
         </pc:spChg>
         <pc:spChg chg="add mod">
-          <ac:chgData name="黒沢　爽次" userId="fae486ef-0c84-45a4-a237-2d2b758b0e89" providerId="ADAL" clId="{64A8C56E-7B60-49D6-AD88-22DC8C2BC8B6}" dt="2026-06-02T03:41:11.713" v="421" actId="20577"/>
+          <ac:chgData name="黒沢　爽次" userId="fae486ef-0c84-45a4-a237-2d2b758b0e89" providerId="ADAL" clId="{64A8C56E-7B60-49D6-AD88-22DC8C2BC8B6}" dt="2026-06-02T04:34:55.245" v="473" actId="1076"/>
           <ac:spMkLst>
             <pc:docMk/>
             <pc:sldMk cId="2222033658" sldId="258"/>
@@ -313,16 +329,24 @@
           </ac:spMkLst>
         </pc:spChg>
         <pc:spChg chg="add mod">
-          <ac:chgData name="黒沢　爽次" userId="fae486ef-0c84-45a4-a237-2d2b758b0e89" providerId="ADAL" clId="{64A8C56E-7B60-49D6-AD88-22DC8C2BC8B6}" dt="2026-06-02T03:42:08.141" v="460" actId="1076"/>
+          <ac:chgData name="黒沢　爽次" userId="fae486ef-0c84-45a4-a237-2d2b758b0e89" providerId="ADAL" clId="{64A8C56E-7B60-49D6-AD88-22DC8C2BC8B6}" dt="2026-06-02T04:34:55.245" v="473" actId="1076"/>
           <ac:spMkLst>
             <pc:docMk/>
             <pc:sldMk cId="2222033658" sldId="258"/>
             <ac:spMk id="13" creationId="{48B357F3-4E27-4F42-A0FE-764683A1B5E4}"/>
           </ac:spMkLst>
         </pc:spChg>
+        <pc:graphicFrameChg chg="add mod modGraphic">
+          <ac:chgData name="黒沢　爽次" userId="fae486ef-0c84-45a4-a237-2d2b758b0e89" providerId="ADAL" clId="{64A8C56E-7B60-49D6-AD88-22DC8C2BC8B6}" dt="2026-06-02T04:37:53.860" v="587" actId="6549"/>
+          <ac:graphicFrameMkLst>
+            <pc:docMk/>
+            <pc:sldMk cId="2222033658" sldId="258"/>
+            <ac:graphicFrameMk id="14" creationId="{62172B09-3E02-4868-891D-FCC55766E2A8}"/>
+          </ac:graphicFrameMkLst>
+        </pc:graphicFrameChg>
       </pc:sldChg>
       <pc:sldChg chg="addSp delSp modSp new mod">
-        <pc:chgData name="黒沢　爽次" userId="fae486ef-0c84-45a4-a237-2d2b758b0e89" providerId="ADAL" clId="{64A8C56E-7B60-49D6-AD88-22DC8C2BC8B6}" dt="2026-06-02T03:42:43.158" v="467"/>
+        <pc:chgData name="黒沢　爽次" userId="fae486ef-0c84-45a4-a237-2d2b758b0e89" providerId="ADAL" clId="{64A8C56E-7B60-49D6-AD88-22DC8C2BC8B6}" dt="2026-06-02T04:38:56.700" v="618" actId="1076"/>
         <pc:sldMkLst>
           <pc:docMk/>
           <pc:sldMk cId="3886514761" sldId="259"/>
@@ -344,7 +368,7 @@
           </ac:spMkLst>
         </pc:spChg>
         <pc:spChg chg="add mod">
-          <ac:chgData name="黒沢　爽次" userId="fae486ef-0c84-45a4-a237-2d2b758b0e89" providerId="ADAL" clId="{64A8C56E-7B60-49D6-AD88-22DC8C2BC8B6}" dt="2026-06-02T03:34:02.748" v="253" actId="20577"/>
+          <ac:chgData name="黒沢　爽次" userId="fae486ef-0c84-45a4-a237-2d2b758b0e89" providerId="ADAL" clId="{64A8C56E-7B60-49D6-AD88-22DC8C2BC8B6}" dt="2026-06-02T04:38:56.700" v="618" actId="1076"/>
           <ac:spMkLst>
             <pc:docMk/>
             <pc:sldMk cId="3886514761" sldId="259"/>
@@ -360,8 +384,8 @@
           </ac:spMkLst>
         </pc:spChg>
       </pc:sldChg>
-      <pc:sldChg chg="addSp delSp modSp new mod">
-        <pc:chgData name="黒沢　爽次" userId="fae486ef-0c84-45a4-a237-2d2b758b0e89" providerId="ADAL" clId="{64A8C56E-7B60-49D6-AD88-22DC8C2BC8B6}" dt="2026-06-02T03:42:44.964" v="469"/>
+      <pc:sldChg chg="addSp delSp modSp new mod ord">
+        <pc:chgData name="黒沢　爽次" userId="fae486ef-0c84-45a4-a237-2d2b758b0e89" providerId="ADAL" clId="{64A8C56E-7B60-49D6-AD88-22DC8C2BC8B6}" dt="2026-06-02T06:22:49.414" v="671" actId="20577"/>
         <pc:sldMkLst>
           <pc:docMk/>
           <pc:sldMk cId="511957640" sldId="260"/>
@@ -391,13 +415,69 @@
           </ac:spMkLst>
         </pc:spChg>
         <pc:spChg chg="add mod">
-          <ac:chgData name="黒沢　爽次" userId="fae486ef-0c84-45a4-a237-2d2b758b0e89" providerId="ADAL" clId="{64A8C56E-7B60-49D6-AD88-22DC8C2BC8B6}" dt="2026-06-02T03:42:44.964" v="469"/>
+          <ac:chgData name="黒沢　爽次" userId="fae486ef-0c84-45a4-a237-2d2b758b0e89" providerId="ADAL" clId="{64A8C56E-7B60-49D6-AD88-22DC8C2BC8B6}" dt="2026-06-02T06:22:20.352" v="652" actId="1076"/>
           <ac:spMkLst>
             <pc:docMk/>
             <pc:sldMk cId="511957640" sldId="260"/>
             <ac:spMk id="5" creationId="{A63D0D9D-BFAD-4C42-BD10-5FC4047E0A1A}"/>
           </ac:spMkLst>
         </pc:spChg>
+        <pc:spChg chg="add mod">
+          <ac:chgData name="黒沢　爽次" userId="fae486ef-0c84-45a4-a237-2d2b758b0e89" providerId="ADAL" clId="{64A8C56E-7B60-49D6-AD88-22DC8C2BC8B6}" dt="2026-06-02T06:22:20.352" v="652" actId="1076"/>
+          <ac:spMkLst>
+            <pc:docMk/>
+            <pc:sldMk cId="511957640" sldId="260"/>
+            <ac:spMk id="6" creationId="{7D2745B4-6DDE-4BA4-A42D-E1DF162F67B6}"/>
+          </ac:spMkLst>
+        </pc:spChg>
+        <pc:spChg chg="add mod">
+          <ac:chgData name="黒沢　爽次" userId="fae486ef-0c84-45a4-a237-2d2b758b0e89" providerId="ADAL" clId="{64A8C56E-7B60-49D6-AD88-22DC8C2BC8B6}" dt="2026-06-02T06:22:20.352" v="652" actId="1076"/>
+          <ac:spMkLst>
+            <pc:docMk/>
+            <pc:sldMk cId="511957640" sldId="260"/>
+            <ac:spMk id="7" creationId="{6EE5427A-C1E8-4768-9AAE-E3FE0228CD53}"/>
+          </ac:spMkLst>
+        </pc:spChg>
+        <pc:spChg chg="add mod">
+          <ac:chgData name="黒沢　爽次" userId="fae486ef-0c84-45a4-a237-2d2b758b0e89" providerId="ADAL" clId="{64A8C56E-7B60-49D6-AD88-22DC8C2BC8B6}" dt="2026-06-02T06:22:20.352" v="652" actId="1076"/>
+          <ac:spMkLst>
+            <pc:docMk/>
+            <pc:sldMk cId="511957640" sldId="260"/>
+            <ac:spMk id="8" creationId="{9F6971CA-6E2E-4107-8F33-3DE3BC936BE9}"/>
+          </ac:spMkLst>
+        </pc:spChg>
+        <pc:spChg chg="add mod">
+          <ac:chgData name="黒沢　爽次" userId="fae486ef-0c84-45a4-a237-2d2b758b0e89" providerId="ADAL" clId="{64A8C56E-7B60-49D6-AD88-22DC8C2BC8B6}" dt="2026-06-02T06:22:20.352" v="652" actId="1076"/>
+          <ac:spMkLst>
+            <pc:docMk/>
+            <pc:sldMk cId="511957640" sldId="260"/>
+            <ac:spMk id="9" creationId="{8A22918C-A955-4DD6-9ADF-8BED5624CC85}"/>
+          </ac:spMkLst>
+        </pc:spChg>
+        <pc:spChg chg="add del mod">
+          <ac:chgData name="黒沢　爽次" userId="fae486ef-0c84-45a4-a237-2d2b758b0e89" providerId="ADAL" clId="{64A8C56E-7B60-49D6-AD88-22DC8C2BC8B6}" dt="2026-06-02T06:22:29.357" v="656"/>
+          <ac:spMkLst>
+            <pc:docMk/>
+            <pc:sldMk cId="511957640" sldId="260"/>
+            <ac:spMk id="10" creationId="{6C0A0816-71EE-43C0-B459-60747F8660FC}"/>
+          </ac:spMkLst>
+        </pc:spChg>
+        <pc:spChg chg="add del mod">
+          <ac:chgData name="黒沢　爽次" userId="fae486ef-0c84-45a4-a237-2d2b758b0e89" providerId="ADAL" clId="{64A8C56E-7B60-49D6-AD88-22DC8C2BC8B6}" dt="2026-06-02T06:22:28.679" v="655"/>
+          <ac:spMkLst>
+            <pc:docMk/>
+            <pc:sldMk cId="511957640" sldId="260"/>
+            <ac:spMk id="11" creationId="{0F91D9A2-2670-466A-969D-734294AEFAE5}"/>
+          </ac:spMkLst>
+        </pc:spChg>
+        <pc:graphicFrameChg chg="add mod modGraphic">
+          <ac:chgData name="黒沢　爽次" userId="fae486ef-0c84-45a4-a237-2d2b758b0e89" providerId="ADAL" clId="{64A8C56E-7B60-49D6-AD88-22DC8C2BC8B6}" dt="2026-06-02T06:22:49.414" v="671" actId="20577"/>
+          <ac:graphicFrameMkLst>
+            <pc:docMk/>
+            <pc:sldMk cId="511957640" sldId="260"/>
+            <ac:graphicFrameMk id="12" creationId="{8759893F-BB97-434E-8E23-E9ED9326A02F}"/>
+          </ac:graphicFrameMkLst>
+        </pc:graphicFrameChg>
       </pc:sldChg>
       <pc:sldChg chg="addSp modSp add mod">
         <pc:chgData name="黒沢　爽次" userId="fae486ef-0c84-45a4-a237-2d2b758b0e89" providerId="ADAL" clId="{64A8C56E-7B60-49D6-AD88-22DC8C2BC8B6}" dt="2026-06-02T03:42:45.798" v="470"/>
@@ -1341,6 +1421,105 @@
           </a:p>
         </p:txBody>
       </p:sp>
+      <p:sp>
+        <p:nvSpPr>
+          <p:cNvPr id="6" name="正方形/長方形 5">
+            <a:extLst>
+              <a:ext uri="{FF2B5EF4-FFF2-40B4-BE49-F238E27FC236}">
+                <a16:creationId xmlns:a16="http://schemas.microsoft.com/office/drawing/2014/main" id="{5B50C9F1-A984-4A58-B5BF-A43A00475759}"/>
+              </a:ext>
+            </a:extLst>
+          </p:cNvPr>
+          <p:cNvSpPr/>
+          <p:nvPr/>
+        </p:nvSpPr>
+        <p:spPr>
+          <a:xfrm>
+            <a:off x="2786742" y="3182587"/>
+            <a:ext cx="5486400" cy="1650670"/>
+          </a:xfrm>
+          <a:prstGeom prst="rect">
+            <a:avLst/>
+          </a:prstGeom>
+        </p:spPr>
+        <p:style>
+          <a:lnRef idx="2">
+            <a:schemeClr val="accent1">
+              <a:shade val="50000"/>
+            </a:schemeClr>
+          </a:lnRef>
+          <a:fillRef idx="1">
+            <a:schemeClr val="accent1"/>
+          </a:fillRef>
+          <a:effectRef idx="0">
+            <a:schemeClr val="accent1"/>
+          </a:effectRef>
+          <a:fontRef idx="minor">
+            <a:schemeClr val="lt1"/>
+          </a:fontRef>
+        </p:style>
+        <p:txBody>
+          <a:bodyPr rtlCol="0" anchor="ctr"/>
+          <a:lstStyle/>
+          <a:p>
+            <a:pPr algn="ctr"/>
+            <a:r>
+              <a:rPr kumimoji="1" lang="ja-JP" altLang="en-US" dirty="0"/>
+              <a:t>タイトル</a:t>
+            </a:r>
+          </a:p>
+        </p:txBody>
+      </p:sp>
+      <p:sp>
+        <p:nvSpPr>
+          <p:cNvPr id="7" name="正方形/長方形 6">
+            <a:extLst>
+              <a:ext uri="{FF2B5EF4-FFF2-40B4-BE49-F238E27FC236}">
+                <a16:creationId xmlns:a16="http://schemas.microsoft.com/office/drawing/2014/main" id="{93FE237F-0A19-4239-9601-E81C8488FA25}"/>
+              </a:ext>
+            </a:extLst>
+          </p:cNvPr>
+          <p:cNvSpPr/>
+          <p:nvPr/>
+        </p:nvSpPr>
+        <p:spPr>
+          <a:xfrm>
+            <a:off x="3645725" y="5130140"/>
+            <a:ext cx="3895106" cy="343187"/>
+          </a:xfrm>
+          <a:prstGeom prst="rect">
+            <a:avLst/>
+          </a:prstGeom>
+        </p:spPr>
+        <p:style>
+          <a:lnRef idx="2">
+            <a:schemeClr val="accent1">
+              <a:shade val="50000"/>
+            </a:schemeClr>
+          </a:lnRef>
+          <a:fillRef idx="1">
+            <a:schemeClr val="accent1"/>
+          </a:fillRef>
+          <a:effectRef idx="0">
+            <a:schemeClr val="accent1"/>
+          </a:effectRef>
+          <a:fontRef idx="minor">
+            <a:schemeClr val="lt1"/>
+          </a:fontRef>
+        </p:style>
+        <p:txBody>
+          <a:bodyPr rtlCol="0" anchor="ctr"/>
+          <a:lstStyle/>
+          <a:p>
+            <a:pPr algn="ctr"/>
+            <a:r>
+              <a:rPr kumimoji="1" lang="en-US" altLang="ja-JP" dirty="0"/>
+              <a:t>PRESS B BUTTON</a:t>
+            </a:r>
+            <a:endParaRPr kumimoji="1" lang="ja-JP" altLang="en-US" dirty="0"/>
+          </a:p>
+        </p:txBody>
+      </p:sp>
     </p:spTree>
     <p:extLst>
       <p:ext uri="{BB962C8B-B14F-4D97-AF65-F5344CB8AC3E}">
@@ -1385,7 +1564,7 @@
         </p:nvSpPr>
         <p:spPr>
           <a:xfrm>
-            <a:off x="1781299" y="1246909"/>
+            <a:off x="665018" y="950026"/>
             <a:ext cx="877163" cy="369332"/>
           </a:xfrm>
           <a:prstGeom prst="rect">
@@ -1421,7 +1600,7 @@
         </p:nvSpPr>
         <p:spPr>
           <a:xfrm>
-            <a:off x="1888178" y="2018805"/>
+            <a:off x="771897" y="1721922"/>
             <a:ext cx="7517080" cy="4322618"/>
           </a:xfrm>
           <a:prstGeom prst="rect">
@@ -1473,7 +1652,7 @@
         </p:nvSpPr>
         <p:spPr>
           <a:xfrm>
-            <a:off x="2541315" y="2947474"/>
+            <a:off x="1425034" y="2650591"/>
             <a:ext cx="2125687" cy="2998171"/>
           </a:xfrm>
           <a:prstGeom prst="ellipse">
@@ -1532,7 +1711,7 @@
         </p:nvSpPr>
         <p:spPr>
           <a:xfrm>
-            <a:off x="5533901" y="2483140"/>
+            <a:off x="4417620" y="2186257"/>
             <a:ext cx="1591293" cy="1696974"/>
           </a:xfrm>
           <a:prstGeom prst="rect">
@@ -1591,7 +1770,7 @@
         </p:nvSpPr>
         <p:spPr>
           <a:xfrm>
-            <a:off x="5533900" y="4406942"/>
+            <a:off x="4417619" y="4110059"/>
             <a:ext cx="1591293" cy="1696973"/>
           </a:xfrm>
           <a:prstGeom prst="rect">
@@ -1650,7 +1829,7 @@
         </p:nvSpPr>
         <p:spPr>
           <a:xfrm>
-            <a:off x="7350823" y="3763696"/>
+            <a:off x="6234542" y="3466813"/>
             <a:ext cx="1591293" cy="1067582"/>
           </a:xfrm>
           <a:prstGeom prst="rect">
@@ -1709,7 +1888,7 @@
         </p:nvSpPr>
         <p:spPr>
           <a:xfrm>
-            <a:off x="7350822" y="5044252"/>
+            <a:off x="6234541" y="4747369"/>
             <a:ext cx="1591293" cy="1067582"/>
           </a:xfrm>
           <a:prstGeom prst="rect">
@@ -1768,7 +1947,7 @@
         </p:nvSpPr>
         <p:spPr>
           <a:xfrm>
-            <a:off x="7350821" y="2483140"/>
+            <a:off x="6234540" y="2186257"/>
             <a:ext cx="1591293" cy="1067582"/>
           </a:xfrm>
           <a:prstGeom prst="rect">
@@ -1827,7 +2006,7 @@
         </p:nvSpPr>
         <p:spPr>
           <a:xfrm>
-            <a:off x="2219880" y="2293733"/>
+            <a:off x="1103599" y="1996850"/>
             <a:ext cx="2565876" cy="378813"/>
           </a:xfrm>
           <a:prstGeom prst="rect">
@@ -1872,6 +2051,362 @@
           </a:p>
         </p:txBody>
       </p:sp>
+      <p:graphicFrame>
+        <p:nvGraphicFramePr>
+          <p:cNvPr id="14" name="表 14">
+            <a:extLst>
+              <a:ext uri="{FF2B5EF4-FFF2-40B4-BE49-F238E27FC236}">
+                <a16:creationId xmlns:a16="http://schemas.microsoft.com/office/drawing/2014/main" id="{62172B09-3E02-4868-891D-FCC55766E2A8}"/>
+              </a:ext>
+            </a:extLst>
+          </p:cNvPr>
+          <p:cNvGraphicFramePr>
+            <a:graphicFrameLocks noGrp="1"/>
+          </p:cNvGraphicFramePr>
+          <p:nvPr>
+            <p:extLst>
+              <p:ext uri="{D42A27DB-BD31-4B8C-83A1-F6EECF244321}">
+                <p14:modId xmlns:p14="http://schemas.microsoft.com/office/powerpoint/2010/main" val="4191072467"/>
+              </p:ext>
+            </p:extLst>
+          </p:nvPr>
+        </p:nvGraphicFramePr>
+        <p:xfrm>
+          <a:off x="8514604" y="1721921"/>
+          <a:ext cx="3443844" cy="4390308"/>
+        </p:xfrm>
+        <a:graphic>
+          <a:graphicData uri="http://schemas.openxmlformats.org/drawingml/2006/table">
+            <a:tbl>
+              <a:tblPr firstRow="1" bandRow="1">
+                <a:tableStyleId>{5C22544A-7EE6-4342-B048-85BDC9FD1C3A}</a:tableStyleId>
+              </a:tblPr>
+              <a:tblGrid>
+                <a:gridCol w="1147948">
+                  <a:extLst>
+                    <a:ext uri="{9D8B030D-6E8A-4147-A177-3AD203B41FA5}">
+                      <a16:colId xmlns:a16="http://schemas.microsoft.com/office/drawing/2014/main" val="3295246977"/>
+                    </a:ext>
+                  </a:extLst>
+                </a:gridCol>
+                <a:gridCol w="1147948">
+                  <a:extLst>
+                    <a:ext uri="{9D8B030D-6E8A-4147-A177-3AD203B41FA5}">
+                      <a16:colId xmlns:a16="http://schemas.microsoft.com/office/drawing/2014/main" val="4116362566"/>
+                    </a:ext>
+                  </a:extLst>
+                </a:gridCol>
+                <a:gridCol w="1147948">
+                  <a:extLst>
+                    <a:ext uri="{9D8B030D-6E8A-4147-A177-3AD203B41FA5}">
+                      <a16:colId xmlns:a16="http://schemas.microsoft.com/office/drawing/2014/main" val="2106011476"/>
+                    </a:ext>
+                  </a:extLst>
+                </a:gridCol>
+              </a:tblGrid>
+              <a:tr h="617517">
+                <a:tc>
+                  <a:txBody>
+                    <a:bodyPr/>
+                    <a:lstStyle/>
+                    <a:p>
+                      <a:r>
+                        <a:rPr kumimoji="1" lang="ja-JP" altLang="en-US" dirty="0"/>
+                        <a:t>キーボード</a:t>
+                      </a:r>
+                    </a:p>
+                  </a:txBody>
+                  <a:tcPr/>
+                </a:tc>
+                <a:tc>
+                  <a:txBody>
+                    <a:bodyPr/>
+                    <a:lstStyle/>
+                    <a:p>
+                      <a:r>
+                        <a:rPr kumimoji="1" lang="ja-JP" altLang="en-US" dirty="0"/>
+                        <a:t>ゲームパッド</a:t>
+                      </a:r>
+                    </a:p>
+                  </a:txBody>
+                  <a:tcPr/>
+                </a:tc>
+                <a:tc>
+                  <a:txBody>
+                    <a:bodyPr/>
+                    <a:lstStyle/>
+                    <a:p>
+                      <a:r>
+                        <a:rPr kumimoji="1" lang="ja-JP" altLang="en-US" dirty="0"/>
+                        <a:t>動作</a:t>
+                      </a:r>
+                    </a:p>
+                  </a:txBody>
+                  <a:tcPr/>
+                </a:tc>
+                <a:extLst>
+                  <a:ext uri="{0D108BD9-81ED-4DB2-BD59-A6C34878D82A}">
+                    <a16:rowId xmlns:a16="http://schemas.microsoft.com/office/drawing/2014/main" val="4252496166"/>
+                  </a:ext>
+                </a:extLst>
+              </a:tr>
+              <a:tr h="617517">
+                <a:tc>
+                  <a:txBody>
+                    <a:bodyPr/>
+                    <a:lstStyle/>
+                    <a:p>
+                      <a:r>
+                        <a:rPr kumimoji="1" lang="ja-JP" altLang="en-US" dirty="0"/>
+                        <a:t>十字キー</a:t>
+                      </a:r>
+                    </a:p>
+                  </a:txBody>
+                  <a:tcPr/>
+                </a:tc>
+                <a:tc>
+                  <a:txBody>
+                    <a:bodyPr/>
+                    <a:lstStyle/>
+                    <a:p>
+                      <a:r>
+                        <a:rPr kumimoji="1" lang="ja-JP" altLang="en-US" dirty="0"/>
+                        <a:t>右スティック</a:t>
+                      </a:r>
+                    </a:p>
+                  </a:txBody>
+                  <a:tcPr/>
+                </a:tc>
+                <a:tc>
+                  <a:txBody>
+                    <a:bodyPr/>
+                    <a:lstStyle/>
+                    <a:p>
+                      <a:r>
+                        <a:rPr kumimoji="1" lang="ja-JP" altLang="en-US" dirty="0"/>
+                        <a:t>カーソル移動</a:t>
+                      </a:r>
+                    </a:p>
+                  </a:txBody>
+                  <a:tcPr/>
+                </a:tc>
+                <a:extLst>
+                  <a:ext uri="{0D108BD9-81ED-4DB2-BD59-A6C34878D82A}">
+                    <a16:rowId xmlns:a16="http://schemas.microsoft.com/office/drawing/2014/main" val="2996830904"/>
+                  </a:ext>
+                </a:extLst>
+              </a:tr>
+              <a:tr h="617517">
+                <a:tc>
+                  <a:txBody>
+                    <a:bodyPr/>
+                    <a:lstStyle/>
+                    <a:p>
+                      <a:r>
+                        <a:rPr kumimoji="1" lang="en-US" altLang="ja-JP" dirty="0"/>
+                        <a:t>Z</a:t>
+                      </a:r>
+                      <a:endParaRPr kumimoji="1" lang="ja-JP" altLang="en-US" dirty="0"/>
+                    </a:p>
+                  </a:txBody>
+                  <a:tcPr/>
+                </a:tc>
+                <a:tc>
+                  <a:txBody>
+                    <a:bodyPr/>
+                    <a:lstStyle/>
+                    <a:p>
+                      <a:r>
+                        <a:rPr kumimoji="1" lang="en-US" altLang="ja-JP" dirty="0"/>
+                        <a:t>B</a:t>
+                      </a:r>
+                      <a:endParaRPr kumimoji="1" lang="ja-JP" altLang="en-US" dirty="0"/>
+                    </a:p>
+                  </a:txBody>
+                  <a:tcPr/>
+                </a:tc>
+                <a:tc>
+                  <a:txBody>
+                    <a:bodyPr/>
+                    <a:lstStyle/>
+                    <a:p>
+                      <a:r>
+                        <a:rPr kumimoji="1" lang="ja-JP" altLang="en-US" dirty="0"/>
+                        <a:t>決定</a:t>
+                      </a:r>
+                    </a:p>
+                  </a:txBody>
+                  <a:tcPr/>
+                </a:tc>
+                <a:extLst>
+                  <a:ext uri="{0D108BD9-81ED-4DB2-BD59-A6C34878D82A}">
+                    <a16:rowId xmlns:a16="http://schemas.microsoft.com/office/drawing/2014/main" val="3772678046"/>
+                  </a:ext>
+                </a:extLst>
+              </a:tr>
+              <a:tr h="617517">
+                <a:tc>
+                  <a:txBody>
+                    <a:bodyPr/>
+                    <a:lstStyle/>
+                    <a:p>
+                      <a:r>
+                        <a:rPr kumimoji="1" lang="en-US" altLang="ja-JP" dirty="0"/>
+                        <a:t>C</a:t>
+                      </a:r>
+                      <a:endParaRPr kumimoji="1" lang="ja-JP" altLang="en-US" dirty="0"/>
+                    </a:p>
+                  </a:txBody>
+                  <a:tcPr/>
+                </a:tc>
+                <a:tc>
+                  <a:txBody>
+                    <a:bodyPr/>
+                    <a:lstStyle/>
+                    <a:p>
+                      <a:r>
+                        <a:rPr kumimoji="1" lang="en-US" altLang="ja-JP" dirty="0"/>
+                        <a:t>A</a:t>
+                      </a:r>
+                      <a:endParaRPr kumimoji="1" lang="ja-JP" altLang="en-US" dirty="0"/>
+                    </a:p>
+                  </a:txBody>
+                  <a:tcPr/>
+                </a:tc>
+                <a:tc>
+                  <a:txBody>
+                    <a:bodyPr/>
+                    <a:lstStyle/>
+                    <a:p>
+                      <a:r>
+                        <a:rPr kumimoji="1" lang="ja-JP" altLang="en-US" dirty="0"/>
+                        <a:t>タイトルへ戻る</a:t>
+                      </a:r>
+                    </a:p>
+                  </a:txBody>
+                  <a:tcPr/>
+                </a:tc>
+                <a:extLst>
+                  <a:ext uri="{0D108BD9-81ED-4DB2-BD59-A6C34878D82A}">
+                    <a16:rowId xmlns:a16="http://schemas.microsoft.com/office/drawing/2014/main" val="692448027"/>
+                  </a:ext>
+                </a:extLst>
+              </a:tr>
+              <a:tr h="617517">
+                <a:tc>
+                  <a:txBody>
+                    <a:bodyPr/>
+                    <a:lstStyle/>
+                    <a:p>
+                      <a:endParaRPr kumimoji="1" lang="ja-JP" altLang="en-US" dirty="0"/>
+                    </a:p>
+                  </a:txBody>
+                  <a:tcPr/>
+                </a:tc>
+                <a:tc>
+                  <a:txBody>
+                    <a:bodyPr/>
+                    <a:lstStyle/>
+                    <a:p>
+                      <a:endParaRPr kumimoji="1" lang="ja-JP" altLang="en-US"/>
+                    </a:p>
+                  </a:txBody>
+                  <a:tcPr/>
+                </a:tc>
+                <a:tc>
+                  <a:txBody>
+                    <a:bodyPr/>
+                    <a:lstStyle/>
+                    <a:p>
+                      <a:endParaRPr kumimoji="1" lang="ja-JP" altLang="en-US"/>
+                    </a:p>
+                  </a:txBody>
+                  <a:tcPr/>
+                </a:tc>
+                <a:extLst>
+                  <a:ext uri="{0D108BD9-81ED-4DB2-BD59-A6C34878D82A}">
+                    <a16:rowId xmlns:a16="http://schemas.microsoft.com/office/drawing/2014/main" val="1582625931"/>
+                  </a:ext>
+                </a:extLst>
+              </a:tr>
+              <a:tr h="617517">
+                <a:tc>
+                  <a:txBody>
+                    <a:bodyPr/>
+                    <a:lstStyle/>
+                    <a:p>
+                      <a:endParaRPr kumimoji="1" lang="ja-JP" altLang="en-US" dirty="0"/>
+                    </a:p>
+                  </a:txBody>
+                  <a:tcPr/>
+                </a:tc>
+                <a:tc>
+                  <a:txBody>
+                    <a:bodyPr/>
+                    <a:lstStyle/>
+                    <a:p>
+                      <a:endParaRPr kumimoji="1" lang="ja-JP" altLang="en-US" dirty="0"/>
+                    </a:p>
+                  </a:txBody>
+                  <a:tcPr/>
+                </a:tc>
+                <a:tc>
+                  <a:txBody>
+                    <a:bodyPr/>
+                    <a:lstStyle/>
+                    <a:p>
+                      <a:endParaRPr kumimoji="1" lang="ja-JP" altLang="en-US"/>
+                    </a:p>
+                  </a:txBody>
+                  <a:tcPr/>
+                </a:tc>
+                <a:extLst>
+                  <a:ext uri="{0D108BD9-81ED-4DB2-BD59-A6C34878D82A}">
+                    <a16:rowId xmlns:a16="http://schemas.microsoft.com/office/drawing/2014/main" val="1660268013"/>
+                  </a:ext>
+                </a:extLst>
+              </a:tr>
+              <a:tr h="617517">
+                <a:tc>
+                  <a:txBody>
+                    <a:bodyPr/>
+                    <a:lstStyle/>
+                    <a:p>
+                      <a:endParaRPr kumimoji="1" lang="ja-JP" altLang="en-US"/>
+                    </a:p>
+                  </a:txBody>
+                  <a:tcPr/>
+                </a:tc>
+                <a:tc>
+                  <a:txBody>
+                    <a:bodyPr/>
+                    <a:lstStyle/>
+                    <a:p>
+                      <a:endParaRPr kumimoji="1" lang="ja-JP" altLang="en-US" dirty="0"/>
+                    </a:p>
+                  </a:txBody>
+                  <a:tcPr/>
+                </a:tc>
+                <a:tc>
+                  <a:txBody>
+                    <a:bodyPr/>
+                    <a:lstStyle/>
+                    <a:p>
+                      <a:endParaRPr kumimoji="1" lang="ja-JP" altLang="en-US" dirty="0"/>
+                    </a:p>
+                  </a:txBody>
+                  <a:tcPr/>
+                </a:tc>
+                <a:extLst>
+                  <a:ext uri="{0D108BD9-81ED-4DB2-BD59-A6C34878D82A}">
+                    <a16:rowId xmlns:a16="http://schemas.microsoft.com/office/drawing/2014/main" val="3464394048"/>
+                  </a:ext>
+                </a:extLst>
+              </a:tr>
+            </a:tbl>
+          </a:graphicData>
+        </a:graphic>
+      </p:graphicFrame>
     </p:spTree>
     <p:extLst>
       <p:ext uri="{BB962C8B-B14F-4D97-AF65-F5344CB8AC3E}">
@@ -1886,6 +2421,715 @@
 </file>
 
 <file path=ppt/slides/slide4.xml><?xml version="1.0" encoding="utf-8"?>
+<p:sld xmlns:a="http://schemas.openxmlformats.org/drawingml/2006/main" xmlns:r="http://schemas.openxmlformats.org/officeDocument/2006/relationships" xmlns:p="http://schemas.openxmlformats.org/presentationml/2006/main">
+  <p:cSld>
+    <p:spTree>
+      <p:nvGrpSpPr>
+        <p:cNvPr id="1" name=""/>
+        <p:cNvGrpSpPr/>
+        <p:nvPr/>
+      </p:nvGrpSpPr>
+      <p:grpSpPr>
+        <a:xfrm>
+          <a:off x="0" y="0"/>
+          <a:ext cx="0" cy="0"/>
+          <a:chOff x="0" y="0"/>
+          <a:chExt cx="0" cy="0"/>
+        </a:xfrm>
+      </p:grpSpPr>
+      <p:sp>
+        <p:nvSpPr>
+          <p:cNvPr id="4" name="テキスト ボックス 3">
+            <a:extLst>
+              <a:ext uri="{FF2B5EF4-FFF2-40B4-BE49-F238E27FC236}">
+                <a16:creationId xmlns:a16="http://schemas.microsoft.com/office/drawing/2014/main" id="{ADF0773D-CED1-41D0-9E05-A7590002AD98}"/>
+              </a:ext>
+            </a:extLst>
+          </p:cNvPr>
+          <p:cNvSpPr txBox="1"/>
+          <p:nvPr/>
+        </p:nvSpPr>
+        <p:spPr>
+          <a:xfrm>
+            <a:off x="1947553" y="1128156"/>
+            <a:ext cx="1338828" cy="369332"/>
+          </a:xfrm>
+          <a:prstGeom prst="rect">
+            <a:avLst/>
+          </a:prstGeom>
+          <a:noFill/>
+        </p:spPr>
+        <p:txBody>
+          <a:bodyPr wrap="none" rtlCol="0">
+            <a:spAutoFit/>
+          </a:bodyPr>
+          <a:lstStyle/>
+          <a:p>
+            <a:r>
+              <a:rPr kumimoji="1" lang="ja-JP" altLang="en-US" dirty="0"/>
+              <a:t>キャラ選択</a:t>
+            </a:r>
+          </a:p>
+        </p:txBody>
+      </p:sp>
+      <p:sp>
+        <p:nvSpPr>
+          <p:cNvPr id="5" name="正方形/長方形 4">
+            <a:extLst>
+              <a:ext uri="{FF2B5EF4-FFF2-40B4-BE49-F238E27FC236}">
+                <a16:creationId xmlns:a16="http://schemas.microsoft.com/office/drawing/2014/main" id="{A63D0D9D-BFAD-4C42-BD10-5FC4047E0A1A}"/>
+              </a:ext>
+            </a:extLst>
+          </p:cNvPr>
+          <p:cNvSpPr/>
+          <p:nvPr/>
+        </p:nvSpPr>
+        <p:spPr>
+          <a:xfrm>
+            <a:off x="665019" y="1935678"/>
+            <a:ext cx="7517080" cy="4322618"/>
+          </a:xfrm>
+          <a:prstGeom prst="rect">
+            <a:avLst/>
+          </a:prstGeom>
+          <a:noFill/>
+          <a:ln>
+            <a:solidFill>
+              <a:schemeClr val="tx1"/>
+            </a:solidFill>
+          </a:ln>
+        </p:spPr>
+        <p:style>
+          <a:lnRef idx="2">
+            <a:schemeClr val="accent1">
+              <a:shade val="50000"/>
+            </a:schemeClr>
+          </a:lnRef>
+          <a:fillRef idx="1">
+            <a:schemeClr val="accent1"/>
+          </a:fillRef>
+          <a:effectRef idx="0">
+            <a:schemeClr val="accent1"/>
+          </a:effectRef>
+          <a:fontRef idx="minor">
+            <a:schemeClr val="lt1"/>
+          </a:fontRef>
+        </p:style>
+        <p:txBody>
+          <a:bodyPr rtlCol="0" anchor="ctr"/>
+          <a:lstStyle/>
+          <a:p>
+            <a:pPr algn="ctr"/>
+            <a:endParaRPr kumimoji="1" lang="ja-JP" altLang="en-US"/>
+          </a:p>
+        </p:txBody>
+      </p:sp>
+      <p:sp>
+        <p:nvSpPr>
+          <p:cNvPr id="6" name="楕円 5">
+            <a:extLst>
+              <a:ext uri="{FF2B5EF4-FFF2-40B4-BE49-F238E27FC236}">
+                <a16:creationId xmlns:a16="http://schemas.microsoft.com/office/drawing/2014/main" id="{7D2745B4-6DDE-4BA4-A42D-E1DF162F67B6}"/>
+              </a:ext>
+            </a:extLst>
+          </p:cNvPr>
+          <p:cNvSpPr/>
+          <p:nvPr/>
+        </p:nvSpPr>
+        <p:spPr>
+          <a:xfrm>
+            <a:off x="1738850" y="2597901"/>
+            <a:ext cx="2125687" cy="2998171"/>
+          </a:xfrm>
+          <a:prstGeom prst="ellipse">
+            <a:avLst/>
+          </a:prstGeom>
+          <a:solidFill>
+            <a:schemeClr val="accent4">
+              <a:lumMod val="20000"/>
+              <a:lumOff val="80000"/>
+            </a:schemeClr>
+          </a:solidFill>
+        </p:spPr>
+        <p:style>
+          <a:lnRef idx="2">
+            <a:schemeClr val="accent1">
+              <a:shade val="50000"/>
+            </a:schemeClr>
+          </a:lnRef>
+          <a:fillRef idx="1">
+            <a:schemeClr val="accent1"/>
+          </a:fillRef>
+          <a:effectRef idx="0">
+            <a:schemeClr val="accent1"/>
+          </a:effectRef>
+          <a:fontRef idx="minor">
+            <a:schemeClr val="lt1"/>
+          </a:fontRef>
+        </p:style>
+        <p:txBody>
+          <a:bodyPr rtlCol="0" anchor="ctr"/>
+          <a:lstStyle/>
+          <a:p>
+            <a:pPr algn="ctr"/>
+            <a:r>
+              <a:rPr kumimoji="1" lang="ja-JP" altLang="en-US" dirty="0">
+                <a:solidFill>
+                  <a:schemeClr val="tx1"/>
+                </a:solidFill>
+              </a:rPr>
+              <a:t>選択中のキャラクター</a:t>
+            </a:r>
+          </a:p>
+        </p:txBody>
+      </p:sp>
+      <p:sp>
+        <p:nvSpPr>
+          <p:cNvPr id="7" name="正方形/長方形 6">
+            <a:extLst>
+              <a:ext uri="{FF2B5EF4-FFF2-40B4-BE49-F238E27FC236}">
+                <a16:creationId xmlns:a16="http://schemas.microsoft.com/office/drawing/2014/main" id="{6EE5427A-C1E8-4768-9AAE-E3FE0228CD53}"/>
+              </a:ext>
+            </a:extLst>
+          </p:cNvPr>
+          <p:cNvSpPr/>
+          <p:nvPr/>
+        </p:nvSpPr>
+        <p:spPr>
+          <a:xfrm>
+            <a:off x="4872841" y="2802577"/>
+            <a:ext cx="2798618" cy="2161309"/>
+          </a:xfrm>
+          <a:prstGeom prst="rect">
+            <a:avLst/>
+          </a:prstGeom>
+          <a:solidFill>
+            <a:schemeClr val="accent1">
+              <a:lumMod val="20000"/>
+              <a:lumOff val="80000"/>
+            </a:schemeClr>
+          </a:solidFill>
+        </p:spPr>
+        <p:style>
+          <a:lnRef idx="2">
+            <a:schemeClr val="accent1">
+              <a:shade val="50000"/>
+            </a:schemeClr>
+          </a:lnRef>
+          <a:fillRef idx="1">
+            <a:schemeClr val="accent1"/>
+          </a:fillRef>
+          <a:effectRef idx="0">
+            <a:schemeClr val="accent1"/>
+          </a:effectRef>
+          <a:fontRef idx="minor">
+            <a:schemeClr val="lt1"/>
+          </a:fontRef>
+        </p:style>
+        <p:txBody>
+          <a:bodyPr rtlCol="0" anchor="ctr"/>
+          <a:lstStyle/>
+          <a:p>
+            <a:pPr algn="ctr"/>
+            <a:r>
+              <a:rPr kumimoji="1" lang="ja-JP" altLang="en-US" dirty="0">
+                <a:solidFill>
+                  <a:schemeClr val="tx1"/>
+                </a:solidFill>
+              </a:rPr>
+              <a:t>ステータス</a:t>
+            </a:r>
+          </a:p>
+        </p:txBody>
+      </p:sp>
+      <p:sp>
+        <p:nvSpPr>
+          <p:cNvPr id="8" name="楕円 7">
+            <a:extLst>
+              <a:ext uri="{FF2B5EF4-FFF2-40B4-BE49-F238E27FC236}">
+                <a16:creationId xmlns:a16="http://schemas.microsoft.com/office/drawing/2014/main" id="{9F6971CA-6E2E-4107-8F33-3DE3BC936BE9}"/>
+              </a:ext>
+            </a:extLst>
+          </p:cNvPr>
+          <p:cNvSpPr/>
+          <p:nvPr/>
+        </p:nvSpPr>
+        <p:spPr>
+          <a:xfrm>
+            <a:off x="910661" y="4963886"/>
+            <a:ext cx="828189" cy="914400"/>
+          </a:xfrm>
+          <a:prstGeom prst="ellipse">
+            <a:avLst/>
+          </a:prstGeom>
+          <a:solidFill>
+            <a:schemeClr val="accent4">
+              <a:lumMod val="20000"/>
+              <a:lumOff val="80000"/>
+            </a:schemeClr>
+          </a:solidFill>
+        </p:spPr>
+        <p:style>
+          <a:lnRef idx="2">
+            <a:schemeClr val="accent1">
+              <a:shade val="50000"/>
+            </a:schemeClr>
+          </a:lnRef>
+          <a:fillRef idx="1">
+            <a:schemeClr val="accent1"/>
+          </a:fillRef>
+          <a:effectRef idx="0">
+            <a:schemeClr val="accent1"/>
+          </a:effectRef>
+          <a:fontRef idx="minor">
+            <a:schemeClr val="lt1"/>
+          </a:fontRef>
+        </p:style>
+        <p:txBody>
+          <a:bodyPr rtlCol="0" anchor="ctr"/>
+          <a:lstStyle/>
+          <a:p>
+            <a:pPr algn="ctr"/>
+            <a:r>
+              <a:rPr kumimoji="1" lang="ja-JP" altLang="en-US" dirty="0">
+                <a:solidFill>
+                  <a:schemeClr val="tx1"/>
+                </a:solidFill>
+              </a:rPr>
+              <a:t>キャラ</a:t>
+            </a:r>
+          </a:p>
+        </p:txBody>
+      </p:sp>
+      <p:sp>
+        <p:nvSpPr>
+          <p:cNvPr id="9" name="楕円 8">
+            <a:extLst>
+              <a:ext uri="{FF2B5EF4-FFF2-40B4-BE49-F238E27FC236}">
+                <a16:creationId xmlns:a16="http://schemas.microsoft.com/office/drawing/2014/main" id="{8A22918C-A955-4DD6-9ADF-8BED5624CC85}"/>
+              </a:ext>
+            </a:extLst>
+          </p:cNvPr>
+          <p:cNvSpPr/>
+          <p:nvPr/>
+        </p:nvSpPr>
+        <p:spPr>
+          <a:xfrm>
+            <a:off x="3823859" y="4963886"/>
+            <a:ext cx="828189" cy="914400"/>
+          </a:xfrm>
+          <a:prstGeom prst="ellipse">
+            <a:avLst/>
+          </a:prstGeom>
+          <a:solidFill>
+            <a:schemeClr val="accent4">
+              <a:lumMod val="20000"/>
+              <a:lumOff val="80000"/>
+            </a:schemeClr>
+          </a:solidFill>
+        </p:spPr>
+        <p:style>
+          <a:lnRef idx="2">
+            <a:schemeClr val="accent1">
+              <a:shade val="50000"/>
+            </a:schemeClr>
+          </a:lnRef>
+          <a:fillRef idx="1">
+            <a:schemeClr val="accent1"/>
+          </a:fillRef>
+          <a:effectRef idx="0">
+            <a:schemeClr val="accent1"/>
+          </a:effectRef>
+          <a:fontRef idx="minor">
+            <a:schemeClr val="lt1"/>
+          </a:fontRef>
+        </p:style>
+        <p:txBody>
+          <a:bodyPr rtlCol="0" anchor="ctr"/>
+          <a:lstStyle/>
+          <a:p>
+            <a:pPr algn="ctr"/>
+            <a:r>
+              <a:rPr kumimoji="1" lang="ja-JP" altLang="en-US" dirty="0">
+                <a:solidFill>
+                  <a:schemeClr val="tx1"/>
+                </a:solidFill>
+              </a:rPr>
+              <a:t>キャラ</a:t>
+            </a:r>
+          </a:p>
+        </p:txBody>
+      </p:sp>
+      <p:graphicFrame>
+        <p:nvGraphicFramePr>
+          <p:cNvPr id="12" name="表 14">
+            <a:extLst>
+              <a:ext uri="{FF2B5EF4-FFF2-40B4-BE49-F238E27FC236}">
+                <a16:creationId xmlns:a16="http://schemas.microsoft.com/office/drawing/2014/main" id="{8759893F-BB97-434E-8E23-E9ED9326A02F}"/>
+              </a:ext>
+            </a:extLst>
+          </p:cNvPr>
+          <p:cNvGraphicFramePr>
+            <a:graphicFrameLocks noGrp="1"/>
+          </p:cNvGraphicFramePr>
+          <p:nvPr>
+            <p:extLst>
+              <p:ext uri="{D42A27DB-BD31-4B8C-83A1-F6EECF244321}">
+                <p14:modId xmlns:p14="http://schemas.microsoft.com/office/powerpoint/2010/main" val="582644436"/>
+              </p:ext>
+            </p:extLst>
+          </p:nvPr>
+        </p:nvGraphicFramePr>
+        <p:xfrm>
+          <a:off x="8514604" y="1721921"/>
+          <a:ext cx="3443844" cy="4390308"/>
+        </p:xfrm>
+        <a:graphic>
+          <a:graphicData uri="http://schemas.openxmlformats.org/drawingml/2006/table">
+            <a:tbl>
+              <a:tblPr firstRow="1" bandRow="1">
+                <a:tableStyleId>{5C22544A-7EE6-4342-B048-85BDC9FD1C3A}</a:tableStyleId>
+              </a:tblPr>
+              <a:tblGrid>
+                <a:gridCol w="1147948">
+                  <a:extLst>
+                    <a:ext uri="{9D8B030D-6E8A-4147-A177-3AD203B41FA5}">
+                      <a16:colId xmlns:a16="http://schemas.microsoft.com/office/drawing/2014/main" val="3295246977"/>
+                    </a:ext>
+                  </a:extLst>
+                </a:gridCol>
+                <a:gridCol w="1147948">
+                  <a:extLst>
+                    <a:ext uri="{9D8B030D-6E8A-4147-A177-3AD203B41FA5}">
+                      <a16:colId xmlns:a16="http://schemas.microsoft.com/office/drawing/2014/main" val="4116362566"/>
+                    </a:ext>
+                  </a:extLst>
+                </a:gridCol>
+                <a:gridCol w="1147948">
+                  <a:extLst>
+                    <a:ext uri="{9D8B030D-6E8A-4147-A177-3AD203B41FA5}">
+                      <a16:colId xmlns:a16="http://schemas.microsoft.com/office/drawing/2014/main" val="2106011476"/>
+                    </a:ext>
+                  </a:extLst>
+                </a:gridCol>
+              </a:tblGrid>
+              <a:tr h="617517">
+                <a:tc>
+                  <a:txBody>
+                    <a:bodyPr/>
+                    <a:lstStyle/>
+                    <a:p>
+                      <a:r>
+                        <a:rPr kumimoji="1" lang="ja-JP" altLang="en-US" dirty="0"/>
+                        <a:t>キーボード</a:t>
+                      </a:r>
+                    </a:p>
+                  </a:txBody>
+                  <a:tcPr/>
+                </a:tc>
+                <a:tc>
+                  <a:txBody>
+                    <a:bodyPr/>
+                    <a:lstStyle/>
+                    <a:p>
+                      <a:r>
+                        <a:rPr kumimoji="1" lang="ja-JP" altLang="en-US" dirty="0"/>
+                        <a:t>ゲームパッド</a:t>
+                      </a:r>
+                    </a:p>
+                  </a:txBody>
+                  <a:tcPr/>
+                </a:tc>
+                <a:tc>
+                  <a:txBody>
+                    <a:bodyPr/>
+                    <a:lstStyle/>
+                    <a:p>
+                      <a:r>
+                        <a:rPr kumimoji="1" lang="ja-JP" altLang="en-US" dirty="0"/>
+                        <a:t>動作</a:t>
+                      </a:r>
+                    </a:p>
+                  </a:txBody>
+                  <a:tcPr/>
+                </a:tc>
+                <a:extLst>
+                  <a:ext uri="{0D108BD9-81ED-4DB2-BD59-A6C34878D82A}">
+                    <a16:rowId xmlns:a16="http://schemas.microsoft.com/office/drawing/2014/main" val="4252496166"/>
+                  </a:ext>
+                </a:extLst>
+              </a:tr>
+              <a:tr h="617517">
+                <a:tc>
+                  <a:txBody>
+                    <a:bodyPr/>
+                    <a:lstStyle/>
+                    <a:p>
+                      <a:r>
+                        <a:rPr kumimoji="1" lang="ja-JP" altLang="en-US" dirty="0"/>
+                        <a:t>十字キー</a:t>
+                      </a:r>
+                    </a:p>
+                  </a:txBody>
+                  <a:tcPr/>
+                </a:tc>
+                <a:tc>
+                  <a:txBody>
+                    <a:bodyPr/>
+                    <a:lstStyle/>
+                    <a:p>
+                      <a:r>
+                        <a:rPr kumimoji="1" lang="ja-JP" altLang="en-US" dirty="0"/>
+                        <a:t>右スティック</a:t>
+                      </a:r>
+                    </a:p>
+                  </a:txBody>
+                  <a:tcPr/>
+                </a:tc>
+                <a:tc>
+                  <a:txBody>
+                    <a:bodyPr/>
+                    <a:lstStyle/>
+                    <a:p>
+                      <a:r>
+                        <a:rPr kumimoji="1" lang="ja-JP" altLang="en-US" dirty="0"/>
+                        <a:t>キャラ変更</a:t>
+                      </a:r>
+                    </a:p>
+                  </a:txBody>
+                  <a:tcPr/>
+                </a:tc>
+                <a:extLst>
+                  <a:ext uri="{0D108BD9-81ED-4DB2-BD59-A6C34878D82A}">
+                    <a16:rowId xmlns:a16="http://schemas.microsoft.com/office/drawing/2014/main" val="2996830904"/>
+                  </a:ext>
+                </a:extLst>
+              </a:tr>
+              <a:tr h="617517">
+                <a:tc>
+                  <a:txBody>
+                    <a:bodyPr/>
+                    <a:lstStyle/>
+                    <a:p>
+                      <a:r>
+                        <a:rPr kumimoji="1" lang="en-US" altLang="ja-JP" dirty="0"/>
+                        <a:t>Z</a:t>
+                      </a:r>
+                      <a:endParaRPr kumimoji="1" lang="ja-JP" altLang="en-US" dirty="0"/>
+                    </a:p>
+                  </a:txBody>
+                  <a:tcPr/>
+                </a:tc>
+                <a:tc>
+                  <a:txBody>
+                    <a:bodyPr/>
+                    <a:lstStyle/>
+                    <a:p>
+                      <a:r>
+                        <a:rPr kumimoji="1" lang="en-US" altLang="ja-JP" dirty="0"/>
+                        <a:t>B</a:t>
+                      </a:r>
+                      <a:endParaRPr kumimoji="1" lang="ja-JP" altLang="en-US" dirty="0"/>
+                    </a:p>
+                  </a:txBody>
+                  <a:tcPr/>
+                </a:tc>
+                <a:tc>
+                  <a:txBody>
+                    <a:bodyPr/>
+                    <a:lstStyle/>
+                    <a:p>
+                      <a:r>
+                        <a:rPr kumimoji="1" lang="ja-JP" altLang="en-US" dirty="0"/>
+                        <a:t>決定</a:t>
+                      </a:r>
+                    </a:p>
+                  </a:txBody>
+                  <a:tcPr/>
+                </a:tc>
+                <a:extLst>
+                  <a:ext uri="{0D108BD9-81ED-4DB2-BD59-A6C34878D82A}">
+                    <a16:rowId xmlns:a16="http://schemas.microsoft.com/office/drawing/2014/main" val="3772678046"/>
+                  </a:ext>
+                </a:extLst>
+              </a:tr>
+              <a:tr h="617517">
+                <a:tc>
+                  <a:txBody>
+                    <a:bodyPr/>
+                    <a:lstStyle/>
+                    <a:p>
+                      <a:r>
+                        <a:rPr kumimoji="1" lang="en-US" altLang="ja-JP" dirty="0"/>
+                        <a:t>C</a:t>
+                      </a:r>
+                      <a:endParaRPr kumimoji="1" lang="ja-JP" altLang="en-US" dirty="0"/>
+                    </a:p>
+                  </a:txBody>
+                  <a:tcPr/>
+                </a:tc>
+                <a:tc>
+                  <a:txBody>
+                    <a:bodyPr/>
+                    <a:lstStyle/>
+                    <a:p>
+                      <a:r>
+                        <a:rPr kumimoji="1" lang="en-US" altLang="ja-JP" dirty="0"/>
+                        <a:t>A</a:t>
+                      </a:r>
+                      <a:endParaRPr kumimoji="1" lang="ja-JP" altLang="en-US" dirty="0"/>
+                    </a:p>
+                  </a:txBody>
+                  <a:tcPr/>
+                </a:tc>
+                <a:tc>
+                  <a:txBody>
+                    <a:bodyPr/>
+                    <a:lstStyle/>
+                    <a:p>
+                      <a:r>
+                        <a:rPr kumimoji="1" lang="ja-JP" altLang="en-US" dirty="0"/>
+                        <a:t>タイトルへ戻る</a:t>
+                      </a:r>
+                    </a:p>
+                  </a:txBody>
+                  <a:tcPr/>
+                </a:tc>
+                <a:extLst>
+                  <a:ext uri="{0D108BD9-81ED-4DB2-BD59-A6C34878D82A}">
+                    <a16:rowId xmlns:a16="http://schemas.microsoft.com/office/drawing/2014/main" val="692448027"/>
+                  </a:ext>
+                </a:extLst>
+              </a:tr>
+              <a:tr h="617517">
+                <a:tc>
+                  <a:txBody>
+                    <a:bodyPr/>
+                    <a:lstStyle/>
+                    <a:p>
+                      <a:endParaRPr kumimoji="1" lang="ja-JP" altLang="en-US" dirty="0"/>
+                    </a:p>
+                  </a:txBody>
+                  <a:tcPr/>
+                </a:tc>
+                <a:tc>
+                  <a:txBody>
+                    <a:bodyPr/>
+                    <a:lstStyle/>
+                    <a:p>
+                      <a:endParaRPr kumimoji="1" lang="ja-JP" altLang="en-US"/>
+                    </a:p>
+                  </a:txBody>
+                  <a:tcPr/>
+                </a:tc>
+                <a:tc>
+                  <a:txBody>
+                    <a:bodyPr/>
+                    <a:lstStyle/>
+                    <a:p>
+                      <a:endParaRPr kumimoji="1" lang="ja-JP" altLang="en-US"/>
+                    </a:p>
+                  </a:txBody>
+                  <a:tcPr/>
+                </a:tc>
+                <a:extLst>
+                  <a:ext uri="{0D108BD9-81ED-4DB2-BD59-A6C34878D82A}">
+                    <a16:rowId xmlns:a16="http://schemas.microsoft.com/office/drawing/2014/main" val="1582625931"/>
+                  </a:ext>
+                </a:extLst>
+              </a:tr>
+              <a:tr h="617517">
+                <a:tc>
+                  <a:txBody>
+                    <a:bodyPr/>
+                    <a:lstStyle/>
+                    <a:p>
+                      <a:endParaRPr kumimoji="1" lang="ja-JP" altLang="en-US" dirty="0"/>
+                    </a:p>
+                  </a:txBody>
+                  <a:tcPr/>
+                </a:tc>
+                <a:tc>
+                  <a:txBody>
+                    <a:bodyPr/>
+                    <a:lstStyle/>
+                    <a:p>
+                      <a:endParaRPr kumimoji="1" lang="ja-JP" altLang="en-US" dirty="0"/>
+                    </a:p>
+                  </a:txBody>
+                  <a:tcPr/>
+                </a:tc>
+                <a:tc>
+                  <a:txBody>
+                    <a:bodyPr/>
+                    <a:lstStyle/>
+                    <a:p>
+                      <a:endParaRPr kumimoji="1" lang="ja-JP" altLang="en-US"/>
+                    </a:p>
+                  </a:txBody>
+                  <a:tcPr/>
+                </a:tc>
+                <a:extLst>
+                  <a:ext uri="{0D108BD9-81ED-4DB2-BD59-A6C34878D82A}">
+                    <a16:rowId xmlns:a16="http://schemas.microsoft.com/office/drawing/2014/main" val="1660268013"/>
+                  </a:ext>
+                </a:extLst>
+              </a:tr>
+              <a:tr h="617517">
+                <a:tc>
+                  <a:txBody>
+                    <a:bodyPr/>
+                    <a:lstStyle/>
+                    <a:p>
+                      <a:endParaRPr kumimoji="1" lang="ja-JP" altLang="en-US"/>
+                    </a:p>
+                  </a:txBody>
+                  <a:tcPr/>
+                </a:tc>
+                <a:tc>
+                  <a:txBody>
+                    <a:bodyPr/>
+                    <a:lstStyle/>
+                    <a:p>
+                      <a:endParaRPr kumimoji="1" lang="ja-JP" altLang="en-US" dirty="0"/>
+                    </a:p>
+                  </a:txBody>
+                  <a:tcPr/>
+                </a:tc>
+                <a:tc>
+                  <a:txBody>
+                    <a:bodyPr/>
+                    <a:lstStyle/>
+                    <a:p>
+                      <a:endParaRPr kumimoji="1" lang="ja-JP" altLang="en-US" dirty="0"/>
+                    </a:p>
+                  </a:txBody>
+                  <a:tcPr/>
+                </a:tc>
+                <a:extLst>
+                  <a:ext uri="{0D108BD9-81ED-4DB2-BD59-A6C34878D82A}">
+                    <a16:rowId xmlns:a16="http://schemas.microsoft.com/office/drawing/2014/main" val="3464394048"/>
+                  </a:ext>
+                </a:extLst>
+              </a:tr>
+            </a:tbl>
+          </a:graphicData>
+        </a:graphic>
+      </p:graphicFrame>
+    </p:spTree>
+    <p:extLst>
+      <p:ext uri="{BB962C8B-B14F-4D97-AF65-F5344CB8AC3E}">
+        <p14:creationId xmlns:p14="http://schemas.microsoft.com/office/powerpoint/2010/main" val="511957640"/>
+      </p:ext>
+    </p:extLst>
+  </p:cSld>
+  <p:clrMapOvr>
+    <a:masterClrMapping/>
+  </p:clrMapOvr>
+</p:sld>
+</file>
+
+<file path=ppt/slides/slide5.xml><?xml version="1.0" encoding="utf-8"?>
 <p:sld xmlns:a="http://schemas.openxmlformats.org/drawingml/2006/main" xmlns:r="http://schemas.openxmlformats.org/officeDocument/2006/relationships" xmlns:p="http://schemas.openxmlformats.org/presentationml/2006/main">
   <p:cSld>
     <p:spTree>
@@ -1993,123 +3237,6 @@
     <p:extLst>
       <p:ext uri="{BB962C8B-B14F-4D97-AF65-F5344CB8AC3E}">
         <p14:creationId xmlns:p14="http://schemas.microsoft.com/office/powerpoint/2010/main" val="3886514761"/>
-      </p:ext>
-    </p:extLst>
-  </p:cSld>
-  <p:clrMapOvr>
-    <a:masterClrMapping/>
-  </p:clrMapOvr>
-</p:sld>
-</file>
-
-<file path=ppt/slides/slide5.xml><?xml version="1.0" encoding="utf-8"?>
-<p:sld xmlns:a="http://schemas.openxmlformats.org/drawingml/2006/main" xmlns:r="http://schemas.openxmlformats.org/officeDocument/2006/relationships" xmlns:p="http://schemas.openxmlformats.org/presentationml/2006/main">
-  <p:cSld>
-    <p:spTree>
-      <p:nvGrpSpPr>
-        <p:cNvPr id="1" name=""/>
-        <p:cNvGrpSpPr/>
-        <p:nvPr/>
-      </p:nvGrpSpPr>
-      <p:grpSpPr>
-        <a:xfrm>
-          <a:off x="0" y="0"/>
-          <a:ext cx="0" cy="0"/>
-          <a:chOff x="0" y="0"/>
-          <a:chExt cx="0" cy="0"/>
-        </a:xfrm>
-      </p:grpSpPr>
-      <p:sp>
-        <p:nvSpPr>
-          <p:cNvPr id="4" name="テキスト ボックス 3">
-            <a:extLst>
-              <a:ext uri="{FF2B5EF4-FFF2-40B4-BE49-F238E27FC236}">
-                <a16:creationId xmlns:a16="http://schemas.microsoft.com/office/drawing/2014/main" id="{ADF0773D-CED1-41D0-9E05-A7590002AD98}"/>
-              </a:ext>
-            </a:extLst>
-          </p:cNvPr>
-          <p:cNvSpPr txBox="1"/>
-          <p:nvPr/>
-        </p:nvSpPr>
-        <p:spPr>
-          <a:xfrm>
-            <a:off x="1947553" y="1128156"/>
-            <a:ext cx="1338828" cy="369332"/>
-          </a:xfrm>
-          <a:prstGeom prst="rect">
-            <a:avLst/>
-          </a:prstGeom>
-          <a:noFill/>
-        </p:spPr>
-        <p:txBody>
-          <a:bodyPr wrap="none" rtlCol="0">
-            <a:spAutoFit/>
-          </a:bodyPr>
-          <a:lstStyle/>
-          <a:p>
-            <a:r>
-              <a:rPr kumimoji="1" lang="ja-JP" altLang="en-US" dirty="0"/>
-              <a:t>マッチング</a:t>
-            </a:r>
-          </a:p>
-        </p:txBody>
-      </p:sp>
-      <p:sp>
-        <p:nvSpPr>
-          <p:cNvPr id="3" name="正方形/長方形 2">
-            <a:extLst>
-              <a:ext uri="{FF2B5EF4-FFF2-40B4-BE49-F238E27FC236}">
-                <a16:creationId xmlns:a16="http://schemas.microsoft.com/office/drawing/2014/main" id="{C2A65D1B-28CA-4FB5-A2D6-B5671F0AA6AC}"/>
-              </a:ext>
-            </a:extLst>
-          </p:cNvPr>
-          <p:cNvSpPr/>
-          <p:nvPr/>
-        </p:nvSpPr>
-        <p:spPr>
-          <a:xfrm>
-            <a:off x="1888178" y="2018805"/>
-            <a:ext cx="7517080" cy="4322618"/>
-          </a:xfrm>
-          <a:prstGeom prst="rect">
-            <a:avLst/>
-          </a:prstGeom>
-          <a:noFill/>
-          <a:ln>
-            <a:solidFill>
-              <a:schemeClr val="tx1"/>
-            </a:solidFill>
-          </a:ln>
-        </p:spPr>
-        <p:style>
-          <a:lnRef idx="2">
-            <a:schemeClr val="accent1">
-              <a:shade val="50000"/>
-            </a:schemeClr>
-          </a:lnRef>
-          <a:fillRef idx="1">
-            <a:schemeClr val="accent1"/>
-          </a:fillRef>
-          <a:effectRef idx="0">
-            <a:schemeClr val="accent1"/>
-          </a:effectRef>
-          <a:fontRef idx="minor">
-            <a:schemeClr val="lt1"/>
-          </a:fontRef>
-        </p:style>
-        <p:txBody>
-          <a:bodyPr rtlCol="0" anchor="ctr"/>
-          <a:lstStyle/>
-          <a:p>
-            <a:pPr algn="ctr"/>
-            <a:endParaRPr kumimoji="1" lang="ja-JP" altLang="en-US"/>
-          </a:p>
-        </p:txBody>
-      </p:sp>
-    </p:spTree>
-    <p:extLst>
-      <p:ext uri="{BB962C8B-B14F-4D97-AF65-F5344CB8AC3E}">
-        <p14:creationId xmlns:p14="http://schemas.microsoft.com/office/powerpoint/2010/main" val="1641547357"/>
       </p:ext>
     </p:extLst>
   </p:cSld>
@@ -2166,17 +3293,17 @@
           <a:p>
             <a:r>
               <a:rPr kumimoji="1" lang="ja-JP" altLang="en-US" dirty="0"/>
-              <a:t>キャラ選択</a:t>
+              <a:t>マッチング</a:t>
             </a:r>
           </a:p>
         </p:txBody>
       </p:sp>
       <p:sp>
         <p:nvSpPr>
-          <p:cNvPr id="5" name="正方形/長方形 4">
+          <p:cNvPr id="3" name="正方形/長方形 2">
             <a:extLst>
               <a:ext uri="{FF2B5EF4-FFF2-40B4-BE49-F238E27FC236}">
-                <a16:creationId xmlns:a16="http://schemas.microsoft.com/office/drawing/2014/main" id="{A63D0D9D-BFAD-4C42-BD10-5FC4047E0A1A}"/>
+                <a16:creationId xmlns:a16="http://schemas.microsoft.com/office/drawing/2014/main" id="{C2A65D1B-28CA-4FB5-A2D6-B5671F0AA6AC}"/>
               </a:ext>
             </a:extLst>
           </p:cNvPr>
@@ -2226,7 +3353,7 @@
     </p:spTree>
     <p:extLst>
       <p:ext uri="{BB962C8B-B14F-4D97-AF65-F5344CB8AC3E}">
-        <p14:creationId xmlns:p14="http://schemas.microsoft.com/office/powerpoint/2010/main" val="511957640"/>
+        <p14:creationId xmlns:p14="http://schemas.microsoft.com/office/powerpoint/2010/main" val="1641547357"/>
       </p:ext>
     </p:extLst>
   </p:cSld>

--- a/仕様書/シーン.pptx
+++ b/仕様書/シーン.pptx
@@ -130,7 +130,7 @@
   <pc:docChgLst>
     <pc:chgData name="黒沢　爽次" userId="fae486ef-0c84-45a4-a237-2d2b758b0e89" providerId="ADAL" clId="{64A8C56E-7B60-49D6-AD88-22DC8C2BC8B6}"/>
     <pc:docChg chg="undo custSel addSld modSld sldOrd">
-      <pc:chgData name="黒沢　爽次" userId="fae486ef-0c84-45a4-a237-2d2b758b0e89" providerId="ADAL" clId="{64A8C56E-7B60-49D6-AD88-22DC8C2BC8B6}" dt="2026-06-03T03:33:24.709" v="2000" actId="1076"/>
+      <pc:chgData name="黒沢　爽次" userId="fae486ef-0c84-45a4-a237-2d2b758b0e89" providerId="ADAL" clId="{64A8C56E-7B60-49D6-AD88-22DC8C2BC8B6}" dt="2026-06-04T02:14:24.287" v="2031" actId="20577"/>
       <pc:docMkLst>
         <pc:docMk/>
       </pc:docMkLst>
@@ -190,7 +190,7 @@
         </pc:spChg>
       </pc:sldChg>
       <pc:sldChg chg="addSp delSp modSp new mod">
-        <pc:chgData name="黒沢　爽次" userId="fae486ef-0c84-45a4-a237-2d2b758b0e89" providerId="ADAL" clId="{64A8C56E-7B60-49D6-AD88-22DC8C2BC8B6}" dt="2026-06-03T03:33:15.150" v="1998" actId="207"/>
+        <pc:chgData name="黒沢　爽次" userId="fae486ef-0c84-45a4-a237-2d2b758b0e89" providerId="ADAL" clId="{64A8C56E-7B60-49D6-AD88-22DC8C2BC8B6}" dt="2026-06-04T02:14:24.287" v="2031" actId="20577"/>
         <pc:sldMkLst>
           <pc:docMk/>
           <pc:sldMk cId="3471022167" sldId="257"/>
@@ -228,7 +228,7 @@
           </ac:spMkLst>
         </pc:spChg>
         <pc:spChg chg="add mod">
-          <ac:chgData name="黒沢　爽次" userId="fae486ef-0c84-45a4-a237-2d2b758b0e89" providerId="ADAL" clId="{64A8C56E-7B60-49D6-AD88-22DC8C2BC8B6}" dt="2026-06-03T03:33:12.450" v="1997" actId="207"/>
+          <ac:chgData name="黒沢　爽次" userId="fae486ef-0c84-45a4-a237-2d2b758b0e89" providerId="ADAL" clId="{64A8C56E-7B60-49D6-AD88-22DC8C2BC8B6}" dt="2026-06-04T02:14:24.287" v="2031" actId="20577"/>
           <ac:spMkLst>
             <pc:docMk/>
             <pc:sldMk cId="3471022167" sldId="257"/>
@@ -696,7 +696,7 @@
         </pc:graphicFrameChg>
       </pc:sldChg>
       <pc:sldChg chg="addSp delSp modSp add mod">
-        <pc:chgData name="黒沢　爽次" userId="fae486ef-0c84-45a4-a237-2d2b758b0e89" providerId="ADAL" clId="{64A8C56E-7B60-49D6-AD88-22DC8C2BC8B6}" dt="2026-06-03T02:45:47.572" v="960" actId="207"/>
+        <pc:chgData name="黒沢　爽次" userId="fae486ef-0c84-45a4-a237-2d2b758b0e89" providerId="ADAL" clId="{64A8C56E-7B60-49D6-AD88-22DC8C2BC8B6}" dt="2026-06-04T01:41:58.584" v="2005" actId="1076"/>
         <pc:sldMkLst>
           <pc:docMk/>
           <pc:sldMk cId="711305694" sldId="263"/>
@@ -781,8 +781,8 @@
             <ac:spMk id="11" creationId="{2DB583ED-ADC2-4BE3-83E1-6BDF8F424C90}"/>
           </ac:spMkLst>
         </pc:spChg>
-        <pc:spChg chg="add mod">
-          <ac:chgData name="黒沢　爽次" userId="fae486ef-0c84-45a4-a237-2d2b758b0e89" providerId="ADAL" clId="{64A8C56E-7B60-49D6-AD88-22DC8C2BC8B6}" dt="2026-06-03T02:44:13.887" v="895" actId="20577"/>
+        <pc:spChg chg="add del mod">
+          <ac:chgData name="黒沢　爽次" userId="fae486ef-0c84-45a4-a237-2d2b758b0e89" providerId="ADAL" clId="{64A8C56E-7B60-49D6-AD88-22DC8C2BC8B6}" dt="2026-06-04T01:41:50.968" v="2003" actId="478"/>
           <ac:spMkLst>
             <pc:docMk/>
             <pc:sldMk cId="711305694" sldId="263"/>
@@ -790,7 +790,7 @@
           </ac:spMkLst>
         </pc:spChg>
         <pc:spChg chg="add mod">
-          <ac:chgData name="黒沢　爽次" userId="fae486ef-0c84-45a4-a237-2d2b758b0e89" providerId="ADAL" clId="{64A8C56E-7B60-49D6-AD88-22DC8C2BC8B6}" dt="2026-06-03T02:44:18.461" v="903" actId="20577"/>
+          <ac:chgData name="黒沢　爽次" userId="fae486ef-0c84-45a4-a237-2d2b758b0e89" providerId="ADAL" clId="{64A8C56E-7B60-49D6-AD88-22DC8C2BC8B6}" dt="2026-06-04T01:41:56.052" v="2004" actId="1076"/>
           <ac:spMkLst>
             <pc:docMk/>
             <pc:sldMk cId="711305694" sldId="263"/>
@@ -798,7 +798,7 @@
           </ac:spMkLst>
         </pc:spChg>
         <pc:spChg chg="add mod">
-          <ac:chgData name="黒沢　爽次" userId="fae486ef-0c84-45a4-a237-2d2b758b0e89" providerId="ADAL" clId="{64A8C56E-7B60-49D6-AD88-22DC8C2BC8B6}" dt="2026-06-03T02:44:23.915" v="916" actId="20577"/>
+          <ac:chgData name="黒沢　爽次" userId="fae486ef-0c84-45a4-a237-2d2b758b0e89" providerId="ADAL" clId="{64A8C56E-7B60-49D6-AD88-22DC8C2BC8B6}" dt="2026-06-04T01:41:56.052" v="2004" actId="1076"/>
           <ac:spMkLst>
             <pc:docMk/>
             <pc:sldMk cId="711305694" sldId="263"/>
@@ -806,7 +806,7 @@
           </ac:spMkLst>
         </pc:spChg>
         <pc:spChg chg="add del mod">
-          <ac:chgData name="黒沢　爽次" userId="fae486ef-0c84-45a4-a237-2d2b758b0e89" providerId="ADAL" clId="{64A8C56E-7B60-49D6-AD88-22DC8C2BC8B6}" dt="2026-06-03T02:45:47.572" v="960" actId="207"/>
+          <ac:chgData name="黒沢　爽次" userId="fae486ef-0c84-45a4-a237-2d2b758b0e89" providerId="ADAL" clId="{64A8C56E-7B60-49D6-AD88-22DC8C2BC8B6}" dt="2026-06-04T01:41:58.584" v="2005" actId="1076"/>
           <ac:spMkLst>
             <pc:docMk/>
             <pc:sldMk cId="711305694" sldId="263"/>
@@ -1475,7 +1475,7 @@
         </pc:graphicFrameChg>
       </pc:sldChg>
       <pc:sldChg chg="addSp delSp modSp new mod">
-        <pc:chgData name="黒沢　爽次" userId="fae486ef-0c84-45a4-a237-2d2b758b0e89" providerId="ADAL" clId="{64A8C56E-7B60-49D6-AD88-22DC8C2BC8B6}" dt="2026-06-03T03:30:49.562" v="1902" actId="14100"/>
+        <pc:chgData name="黒沢　爽次" userId="fae486ef-0c84-45a4-a237-2d2b758b0e89" providerId="ADAL" clId="{64A8C56E-7B60-49D6-AD88-22DC8C2BC8B6}" dt="2026-06-04T01:39:25.915" v="2001" actId="478"/>
         <pc:sldMkLst>
           <pc:docMk/>
           <pc:sldMk cId="1148238646" sldId="268"/>
@@ -1496,8 +1496,8 @@
             <ac:spMk id="3" creationId="{448D384C-6D3D-42F3-BBCD-FBC54E608FF2}"/>
           </ac:spMkLst>
         </pc:spChg>
-        <pc:spChg chg="add mod">
-          <ac:chgData name="黒沢　爽次" userId="fae486ef-0c84-45a4-a237-2d2b758b0e89" providerId="ADAL" clId="{64A8C56E-7B60-49D6-AD88-22DC8C2BC8B6}" dt="2026-06-03T03:23:36.996" v="1744" actId="1076"/>
+        <pc:spChg chg="add del mod">
+          <ac:chgData name="黒沢　爽次" userId="fae486ef-0c84-45a4-a237-2d2b758b0e89" providerId="ADAL" clId="{64A8C56E-7B60-49D6-AD88-22DC8C2BC8B6}" dt="2026-06-04T01:39:25.915" v="2001" actId="478"/>
           <ac:spMkLst>
             <pc:docMk/>
             <pc:sldMk cId="1148238646" sldId="268"/>
@@ -3720,10 +3720,10 @@
       </p:sp>
       <p:sp>
         <p:nvSpPr>
-          <p:cNvPr id="12" name="正方形/長方形 11">
-            <a:extLst>
-              <a:ext uri="{FF2B5EF4-FFF2-40B4-BE49-F238E27FC236}">
-                <a16:creationId xmlns:a16="http://schemas.microsoft.com/office/drawing/2014/main" id="{50A1592F-F873-43E1-8593-469D5644FB1B}"/>
+          <p:cNvPr id="13" name="正方形/長方形 12">
+            <a:extLst>
+              <a:ext uri="{FF2B5EF4-FFF2-40B4-BE49-F238E27FC236}">
+                <a16:creationId xmlns:a16="http://schemas.microsoft.com/office/drawing/2014/main" id="{5FCFE8A9-0D8E-4BFD-A845-DAC9EB4667B2}"/>
               </a:ext>
             </a:extLst>
           </p:cNvPr>
@@ -3732,66 +3732,7 @@
         </p:nvSpPr>
         <p:spPr>
           <a:xfrm>
-            <a:off x="2500861" y="5559634"/>
-            <a:ext cx="620369" cy="581890"/>
-          </a:xfrm>
-          <a:prstGeom prst="rect">
-            <a:avLst/>
-          </a:prstGeom>
-          <a:solidFill>
-            <a:schemeClr val="accent1">
-              <a:lumMod val="20000"/>
-              <a:lumOff val="80000"/>
-            </a:schemeClr>
-          </a:solidFill>
-        </p:spPr>
-        <p:style>
-          <a:lnRef idx="2">
-            <a:schemeClr val="accent1">
-              <a:shade val="50000"/>
-            </a:schemeClr>
-          </a:lnRef>
-          <a:fillRef idx="1">
-            <a:schemeClr val="accent1"/>
-          </a:fillRef>
-          <a:effectRef idx="0">
-            <a:schemeClr val="accent1"/>
-          </a:effectRef>
-          <a:fontRef idx="minor">
-            <a:schemeClr val="lt1"/>
-          </a:fontRef>
-        </p:style>
-        <p:txBody>
-          <a:bodyPr rtlCol="0" anchor="ctr"/>
-          <a:lstStyle/>
-          <a:p>
-            <a:pPr algn="ctr"/>
-            <a:r>
-              <a:rPr kumimoji="1" lang="ja-JP" altLang="en-US" sz="1200" dirty="0">
-                <a:solidFill>
-                  <a:schemeClr val="tx1"/>
-                </a:solidFill>
-              </a:rPr>
-              <a:t>攻撃</a:t>
-            </a:r>
-          </a:p>
-        </p:txBody>
-      </p:sp>
-      <p:sp>
-        <p:nvSpPr>
-          <p:cNvPr id="13" name="正方形/長方形 12">
-            <a:extLst>
-              <a:ext uri="{FF2B5EF4-FFF2-40B4-BE49-F238E27FC236}">
-                <a16:creationId xmlns:a16="http://schemas.microsoft.com/office/drawing/2014/main" id="{5FCFE8A9-0D8E-4BFD-A845-DAC9EB4667B2}"/>
-              </a:ext>
-            </a:extLst>
-          </p:cNvPr>
-          <p:cNvSpPr/>
-          <p:nvPr/>
-        </p:nvSpPr>
-        <p:spPr>
-          <a:xfrm>
-            <a:off x="3278697" y="5561612"/>
+            <a:off x="2584863" y="5514677"/>
             <a:ext cx="620369" cy="581890"/>
           </a:xfrm>
           <a:prstGeom prst="rect">
@@ -3850,7 +3791,7 @@
         </p:nvSpPr>
         <p:spPr>
           <a:xfrm>
-            <a:off x="4056533" y="5561612"/>
+            <a:off x="3362699" y="5514677"/>
             <a:ext cx="620369" cy="581890"/>
           </a:xfrm>
           <a:prstGeom prst="rect">
@@ -3909,7 +3850,7 @@
         </p:nvSpPr>
         <p:spPr>
           <a:xfrm>
-            <a:off x="3811979" y="6365174"/>
+            <a:off x="2724834" y="6353300"/>
             <a:ext cx="864923" cy="378814"/>
           </a:xfrm>
           <a:prstGeom prst="wedgeRectCallout">
@@ -6438,41 +6379,6 @@
       </p:grpSpPr>
       <p:sp>
         <p:nvSpPr>
-          <p:cNvPr id="4" name="テキスト ボックス 3">
-            <a:extLst>
-              <a:ext uri="{FF2B5EF4-FFF2-40B4-BE49-F238E27FC236}">
-                <a16:creationId xmlns:a16="http://schemas.microsoft.com/office/drawing/2014/main" id="{843C87E8-1432-41BE-BEA6-3D93EB0A0BD2}"/>
-              </a:ext>
-            </a:extLst>
-          </p:cNvPr>
-          <p:cNvSpPr txBox="1"/>
-          <p:nvPr/>
-        </p:nvSpPr>
-        <p:spPr>
-          <a:xfrm>
-            <a:off x="890650" y="605641"/>
-            <a:ext cx="1800493" cy="369332"/>
-          </a:xfrm>
-          <a:prstGeom prst="rect">
-            <a:avLst/>
-          </a:prstGeom>
-          <a:noFill/>
-        </p:spPr>
-        <p:txBody>
-          <a:bodyPr wrap="none" rtlCol="0">
-            <a:spAutoFit/>
-          </a:bodyPr>
-          <a:lstStyle/>
-          <a:p>
-            <a:r>
-              <a:rPr kumimoji="1" lang="ja-JP" altLang="en-US" dirty="0"/>
-              <a:t>フローチャート</a:t>
-            </a:r>
-          </a:p>
-        </p:txBody>
-      </p:sp>
-      <p:sp>
-        <p:nvSpPr>
           <p:cNvPr id="5" name="正方形/長方形 4">
             <a:extLst>
               <a:ext uri="{FF2B5EF4-FFF2-40B4-BE49-F238E27FC236}">
@@ -7865,13 +7771,29 @@
           <a:p>
             <a:pPr algn="ctr"/>
             <a:r>
-              <a:rPr kumimoji="1" lang="ja-JP" altLang="en-US" dirty="0">
+              <a:rPr kumimoji="1" lang="en-US" altLang="ja-JP" dirty="0">
                 <a:solidFill>
                   <a:schemeClr val="tx1"/>
                 </a:solidFill>
               </a:rPr>
-              <a:t>タイトル</a:t>
+              <a:t>Guess It</a:t>
             </a:r>
+          </a:p>
+          <a:p>
+            <a:pPr algn="ctr"/>
+            <a:r>
+              <a:rPr lang="ja-JP" altLang="en-US" dirty="0">
+                <a:solidFill>
+                  <a:schemeClr val="tx1"/>
+                </a:solidFill>
+              </a:rPr>
+              <a:t>（仮タイトル）</a:t>
+            </a:r>
+            <a:endParaRPr kumimoji="1" lang="ja-JP" altLang="en-US" dirty="0">
+              <a:solidFill>
+                <a:schemeClr val="tx1"/>
+              </a:solidFill>
+            </a:endParaRPr>
           </a:p>
         </p:txBody>
       </p:sp>

--- a/仕様書/シーン.pptx
+++ b/仕様書/シーン.pptx
@@ -130,7 +130,7 @@
   <pc:docChgLst>
     <pc:chgData name="黒沢　爽次" userId="fae486ef-0c84-45a4-a237-2d2b758b0e89" providerId="ADAL" clId="{64A8C56E-7B60-49D6-AD88-22DC8C2BC8B6}"/>
     <pc:docChg chg="undo custSel addSld modSld sldOrd">
-      <pc:chgData name="黒沢　爽次" userId="fae486ef-0c84-45a4-a237-2d2b758b0e89" providerId="ADAL" clId="{64A8C56E-7B60-49D6-AD88-22DC8C2BC8B6}" dt="2026-06-04T02:14:24.287" v="2031" actId="20577"/>
+      <pc:chgData name="黒沢　爽次" userId="fae486ef-0c84-45a4-a237-2d2b758b0e89" providerId="ADAL" clId="{64A8C56E-7B60-49D6-AD88-22DC8C2BC8B6}" dt="2026-06-04T02:22:41.352" v="2152" actId="20577"/>
       <pc:docMkLst>
         <pc:docMk/>
       </pc:docMkLst>
@@ -1475,11 +1475,19 @@
         </pc:graphicFrameChg>
       </pc:sldChg>
       <pc:sldChg chg="addSp delSp modSp new mod">
-        <pc:chgData name="黒沢　爽次" userId="fae486ef-0c84-45a4-a237-2d2b758b0e89" providerId="ADAL" clId="{64A8C56E-7B60-49D6-AD88-22DC8C2BC8B6}" dt="2026-06-04T01:39:25.915" v="2001" actId="478"/>
+        <pc:chgData name="黒沢　爽次" userId="fae486ef-0c84-45a4-a237-2d2b758b0e89" providerId="ADAL" clId="{64A8C56E-7B60-49D6-AD88-22DC8C2BC8B6}" dt="2026-06-04T02:22:41.352" v="2152" actId="20577"/>
         <pc:sldMkLst>
           <pc:docMk/>
           <pc:sldMk cId="1148238646" sldId="268"/>
         </pc:sldMkLst>
+        <pc:spChg chg="add mod">
+          <ac:chgData name="黒沢　爽次" userId="fae486ef-0c84-45a4-a237-2d2b758b0e89" providerId="ADAL" clId="{64A8C56E-7B60-49D6-AD88-22DC8C2BC8B6}" dt="2026-06-04T02:22:41.352" v="2152" actId="20577"/>
+          <ac:spMkLst>
+            <pc:docMk/>
+            <pc:sldMk cId="1148238646" sldId="268"/>
+            <ac:spMk id="2" creationId="{70F26E17-31C7-4054-8EF4-1A65EEE984CE}"/>
+          </ac:spMkLst>
+        </pc:spChg>
         <pc:spChg chg="del">
           <ac:chgData name="黒沢　爽次" userId="fae486ef-0c84-45a4-a237-2d2b758b0e89" providerId="ADAL" clId="{64A8C56E-7B60-49D6-AD88-22DC8C2BC8B6}" dt="2026-06-03T03:23:04.539" v="1718" actId="478"/>
           <ac:spMkLst>
@@ -1505,7 +1513,7 @@
           </ac:spMkLst>
         </pc:spChg>
         <pc:spChg chg="add mod">
-          <ac:chgData name="黒沢　爽次" userId="fae486ef-0c84-45a4-a237-2d2b758b0e89" providerId="ADAL" clId="{64A8C56E-7B60-49D6-AD88-22DC8C2BC8B6}" dt="2026-06-03T03:23:39.228" v="1745" actId="1076"/>
+          <ac:chgData name="黒沢　爽次" userId="fae486ef-0c84-45a4-a237-2d2b758b0e89" providerId="ADAL" clId="{64A8C56E-7B60-49D6-AD88-22DC8C2BC8B6}" dt="2026-06-04T02:22:07.964" v="2138" actId="20577"/>
           <ac:spMkLst>
             <pc:docMk/>
             <pc:sldMk cId="1148238646" sldId="268"/>
@@ -1513,7 +1521,7 @@
           </ac:spMkLst>
         </pc:spChg>
         <pc:spChg chg="add mod">
-          <ac:chgData name="黒沢　爽次" userId="fae486ef-0c84-45a4-a237-2d2b758b0e89" providerId="ADAL" clId="{64A8C56E-7B60-49D6-AD88-22DC8C2BC8B6}" dt="2026-06-03T03:24:08.241" v="1759" actId="20577"/>
+          <ac:chgData name="黒沢　爽次" userId="fae486ef-0c84-45a4-a237-2d2b758b0e89" providerId="ADAL" clId="{64A8C56E-7B60-49D6-AD88-22DC8C2BC8B6}" dt="2026-06-04T02:22:02.769" v="2131" actId="1076"/>
           <ac:spMkLst>
             <pc:docMk/>
             <pc:sldMk cId="1148238646" sldId="268"/>
@@ -1521,7 +1529,7 @@
           </ac:spMkLst>
         </pc:spChg>
         <pc:spChg chg="add mod">
-          <ac:chgData name="黒沢　爽次" userId="fae486ef-0c84-45a4-a237-2d2b758b0e89" providerId="ADAL" clId="{64A8C56E-7B60-49D6-AD88-22DC8C2BC8B6}" dt="2026-06-03T03:25:00.985" v="1781" actId="255"/>
+          <ac:chgData name="黒沢　爽次" userId="fae486ef-0c84-45a4-a237-2d2b758b0e89" providerId="ADAL" clId="{64A8C56E-7B60-49D6-AD88-22DC8C2BC8B6}" dt="2026-06-04T02:22:02.769" v="2131" actId="1076"/>
           <ac:spMkLst>
             <pc:docMk/>
             <pc:sldMk cId="1148238646" sldId="268"/>
@@ -1529,7 +1537,7 @@
           </ac:spMkLst>
         </pc:spChg>
         <pc:spChg chg="add mod">
-          <ac:chgData name="黒沢　爽次" userId="fae486ef-0c84-45a4-a237-2d2b758b0e89" providerId="ADAL" clId="{64A8C56E-7B60-49D6-AD88-22DC8C2BC8B6}" dt="2026-06-03T03:25:21.135" v="1801" actId="1076"/>
+          <ac:chgData name="黒沢　爽次" userId="fae486ef-0c84-45a4-a237-2d2b758b0e89" providerId="ADAL" clId="{64A8C56E-7B60-49D6-AD88-22DC8C2BC8B6}" dt="2026-06-04T02:22:02.769" v="2131" actId="1076"/>
           <ac:spMkLst>
             <pc:docMk/>
             <pc:sldMk cId="1148238646" sldId="268"/>
@@ -1537,7 +1545,7 @@
           </ac:spMkLst>
         </pc:spChg>
         <pc:spChg chg="add mod">
-          <ac:chgData name="黒沢　爽次" userId="fae486ef-0c84-45a4-a237-2d2b758b0e89" providerId="ADAL" clId="{64A8C56E-7B60-49D6-AD88-22DC8C2BC8B6}" dt="2026-06-03T03:26:27.089" v="1821" actId="20577"/>
+          <ac:chgData name="黒沢　爽次" userId="fae486ef-0c84-45a4-a237-2d2b758b0e89" providerId="ADAL" clId="{64A8C56E-7B60-49D6-AD88-22DC8C2BC8B6}" dt="2026-06-04T02:22:02.769" v="2131" actId="1076"/>
           <ac:spMkLst>
             <pc:docMk/>
             <pc:sldMk cId="1148238646" sldId="268"/>
@@ -1545,7 +1553,15 @@
           </ac:spMkLst>
         </pc:spChg>
         <pc:spChg chg="add mod">
-          <ac:chgData name="黒沢　爽次" userId="fae486ef-0c84-45a4-a237-2d2b758b0e89" providerId="ADAL" clId="{64A8C56E-7B60-49D6-AD88-22DC8C2BC8B6}" dt="2026-06-03T03:27:05.249" v="1843" actId="20577"/>
+          <ac:chgData name="黒沢　爽次" userId="fae486ef-0c84-45a4-a237-2d2b758b0e89" providerId="ADAL" clId="{64A8C56E-7B60-49D6-AD88-22DC8C2BC8B6}" dt="2026-06-04T02:22:02.769" v="2131" actId="1076"/>
+          <ac:spMkLst>
+            <pc:docMk/>
+            <pc:sldMk cId="1148238646" sldId="268"/>
+            <ac:spMk id="28" creationId="{B1F8E11B-BBDE-4136-8FA9-9CA7EDEDB601}"/>
+          </ac:spMkLst>
+        </pc:spChg>
+        <pc:spChg chg="add mod">
+          <ac:chgData name="黒沢　爽次" userId="fae486ef-0c84-45a4-a237-2d2b758b0e89" providerId="ADAL" clId="{64A8C56E-7B60-49D6-AD88-22DC8C2BC8B6}" dt="2026-06-04T02:22:02.769" v="2131" actId="1076"/>
           <ac:spMkLst>
             <pc:docMk/>
             <pc:sldMk cId="1148238646" sldId="268"/>
@@ -1553,7 +1569,7 @@
           </ac:spMkLst>
         </pc:spChg>
         <pc:spChg chg="add mod">
-          <ac:chgData name="黒沢　爽次" userId="fae486ef-0c84-45a4-a237-2d2b758b0e89" providerId="ADAL" clId="{64A8C56E-7B60-49D6-AD88-22DC8C2BC8B6}" dt="2026-06-03T03:28:58.103" v="1863" actId="20577"/>
+          <ac:chgData name="黒沢　爽次" userId="fae486ef-0c84-45a4-a237-2d2b758b0e89" providerId="ADAL" clId="{64A8C56E-7B60-49D6-AD88-22DC8C2BC8B6}" dt="2026-06-04T02:22:02.769" v="2131" actId="1076"/>
           <ac:spMkLst>
             <pc:docMk/>
             <pc:sldMk cId="1148238646" sldId="268"/>
@@ -1561,7 +1577,7 @@
           </ac:spMkLst>
         </pc:spChg>
         <pc:spChg chg="add mod">
-          <ac:chgData name="黒沢　爽次" userId="fae486ef-0c84-45a4-a237-2d2b758b0e89" providerId="ADAL" clId="{64A8C56E-7B60-49D6-AD88-22DC8C2BC8B6}" dt="2026-06-03T03:29:59.098" v="1891" actId="20577"/>
+          <ac:chgData name="黒沢　爽次" userId="fae486ef-0c84-45a4-a237-2d2b758b0e89" providerId="ADAL" clId="{64A8C56E-7B60-49D6-AD88-22DC8C2BC8B6}" dt="2026-06-04T02:22:02.769" v="2131" actId="1076"/>
           <ac:spMkLst>
             <pc:docMk/>
             <pc:sldMk cId="1148238646" sldId="268"/>
@@ -1569,7 +1585,7 @@
           </ac:spMkLst>
         </pc:spChg>
         <pc:spChg chg="add mod">
-          <ac:chgData name="黒沢　爽次" userId="fae486ef-0c84-45a4-a237-2d2b758b0e89" providerId="ADAL" clId="{64A8C56E-7B60-49D6-AD88-22DC8C2BC8B6}" dt="2026-06-03T03:29:51.752" v="1880" actId="20577"/>
+          <ac:chgData name="黒沢　爽次" userId="fae486ef-0c84-45a4-a237-2d2b758b0e89" providerId="ADAL" clId="{64A8C56E-7B60-49D6-AD88-22DC8C2BC8B6}" dt="2026-06-04T02:22:02.769" v="2131" actId="1076"/>
           <ac:spMkLst>
             <pc:docMk/>
             <pc:sldMk cId="1148238646" sldId="268"/>
@@ -1577,7 +1593,7 @@
           </ac:spMkLst>
         </pc:spChg>
         <pc:cxnChg chg="add mod">
-          <ac:chgData name="黒沢　爽次" userId="fae486ef-0c84-45a4-a237-2d2b758b0e89" providerId="ADAL" clId="{64A8C56E-7B60-49D6-AD88-22DC8C2BC8B6}" dt="2026-06-03T03:24:44.380" v="1766" actId="1076"/>
+          <ac:chgData name="黒沢　爽次" userId="fae486ef-0c84-45a4-a237-2d2b758b0e89" providerId="ADAL" clId="{64A8C56E-7B60-49D6-AD88-22DC8C2BC8B6}" dt="2026-06-04T02:22:14.030" v="2140" actId="1076"/>
           <ac:cxnSpMkLst>
             <pc:docMk/>
             <pc:sldMk cId="1148238646" sldId="268"/>
@@ -1585,7 +1601,7 @@
           </ac:cxnSpMkLst>
         </pc:cxnChg>
         <pc:cxnChg chg="add mod">
-          <ac:chgData name="黒沢　爽次" userId="fae486ef-0c84-45a4-a237-2d2b758b0e89" providerId="ADAL" clId="{64A8C56E-7B60-49D6-AD88-22DC8C2BC8B6}" dt="2026-06-03T03:24:22.938" v="1764" actId="14100"/>
+          <ac:chgData name="黒沢　爽次" userId="fae486ef-0c84-45a4-a237-2d2b758b0e89" providerId="ADAL" clId="{64A8C56E-7B60-49D6-AD88-22DC8C2BC8B6}" dt="2026-06-04T02:22:02.769" v="2131" actId="1076"/>
           <ac:cxnSpMkLst>
             <pc:docMk/>
             <pc:sldMk cId="1148238646" sldId="268"/>
@@ -1593,7 +1609,7 @@
           </ac:cxnSpMkLst>
         </pc:cxnChg>
         <pc:cxnChg chg="add mod">
-          <ac:chgData name="黒沢　爽次" userId="fae486ef-0c84-45a4-a237-2d2b758b0e89" providerId="ADAL" clId="{64A8C56E-7B60-49D6-AD88-22DC8C2BC8B6}" dt="2026-06-03T03:24:48.349" v="1768" actId="1076"/>
+          <ac:chgData name="黒沢　爽次" userId="fae486ef-0c84-45a4-a237-2d2b758b0e89" providerId="ADAL" clId="{64A8C56E-7B60-49D6-AD88-22DC8C2BC8B6}" dt="2026-06-04T02:22:02.769" v="2131" actId="1076"/>
           <ac:cxnSpMkLst>
             <pc:docMk/>
             <pc:sldMk cId="1148238646" sldId="268"/>
@@ -1601,7 +1617,7 @@
           </ac:cxnSpMkLst>
         </pc:cxnChg>
         <pc:cxnChg chg="add mod">
-          <ac:chgData name="黒沢　爽次" userId="fae486ef-0c84-45a4-a237-2d2b758b0e89" providerId="ADAL" clId="{64A8C56E-7B60-49D6-AD88-22DC8C2BC8B6}" dt="2026-06-03T03:25:10.716" v="1785" actId="1076"/>
+          <ac:chgData name="黒沢　爽次" userId="fae486ef-0c84-45a4-a237-2d2b758b0e89" providerId="ADAL" clId="{64A8C56E-7B60-49D6-AD88-22DC8C2BC8B6}" dt="2026-06-04T02:22:02.769" v="2131" actId="1076"/>
           <ac:cxnSpMkLst>
             <pc:docMk/>
             <pc:sldMk cId="1148238646" sldId="268"/>
@@ -1609,7 +1625,7 @@
           </ac:cxnSpMkLst>
         </pc:cxnChg>
         <pc:cxnChg chg="add mod">
-          <ac:chgData name="黒沢　爽次" userId="fae486ef-0c84-45a4-a237-2d2b758b0e89" providerId="ADAL" clId="{64A8C56E-7B60-49D6-AD88-22DC8C2BC8B6}" dt="2026-06-03T03:25:38.473" v="1805" actId="1076"/>
+          <ac:chgData name="黒沢　爽次" userId="fae486ef-0c84-45a4-a237-2d2b758b0e89" providerId="ADAL" clId="{64A8C56E-7B60-49D6-AD88-22DC8C2BC8B6}" dt="2026-06-04T02:22:02.769" v="2131" actId="1076"/>
           <ac:cxnSpMkLst>
             <pc:docMk/>
             <pc:sldMk cId="1148238646" sldId="268"/>
@@ -1617,7 +1633,7 @@
           </ac:cxnSpMkLst>
         </pc:cxnChg>
         <pc:cxnChg chg="add mod">
-          <ac:chgData name="黒沢　爽次" userId="fae486ef-0c84-45a4-a237-2d2b758b0e89" providerId="ADAL" clId="{64A8C56E-7B60-49D6-AD88-22DC8C2BC8B6}" dt="2026-06-03T03:25:50.045" v="1807" actId="14100"/>
+          <ac:chgData name="黒沢　爽次" userId="fae486ef-0c84-45a4-a237-2d2b758b0e89" providerId="ADAL" clId="{64A8C56E-7B60-49D6-AD88-22DC8C2BC8B6}" dt="2026-06-04T02:22:02.769" v="2131" actId="1076"/>
           <ac:cxnSpMkLst>
             <pc:docMk/>
             <pc:sldMk cId="1148238646" sldId="268"/>
@@ -1625,7 +1641,7 @@
           </ac:cxnSpMkLst>
         </pc:cxnChg>
         <pc:cxnChg chg="add mod">
-          <ac:chgData name="黒沢　爽次" userId="fae486ef-0c84-45a4-a237-2d2b758b0e89" providerId="ADAL" clId="{64A8C56E-7B60-49D6-AD88-22DC8C2BC8B6}" dt="2026-06-03T03:26:08.565" v="1812" actId="14100"/>
+          <ac:chgData name="黒沢　爽次" userId="fae486ef-0c84-45a4-a237-2d2b758b0e89" providerId="ADAL" clId="{64A8C56E-7B60-49D6-AD88-22DC8C2BC8B6}" dt="2026-06-04T02:22:02.769" v="2131" actId="1076"/>
           <ac:cxnSpMkLst>
             <pc:docMk/>
             <pc:sldMk cId="1148238646" sldId="268"/>
@@ -1633,7 +1649,7 @@
           </ac:cxnSpMkLst>
         </pc:cxnChg>
         <pc:cxnChg chg="add mod">
-          <ac:chgData name="黒沢　爽次" userId="fae486ef-0c84-45a4-a237-2d2b758b0e89" providerId="ADAL" clId="{64A8C56E-7B60-49D6-AD88-22DC8C2BC8B6}" dt="2026-06-03T03:26:20.011" v="1817" actId="14100"/>
+          <ac:chgData name="黒沢　爽次" userId="fae486ef-0c84-45a4-a237-2d2b758b0e89" providerId="ADAL" clId="{64A8C56E-7B60-49D6-AD88-22DC8C2BC8B6}" dt="2026-06-04T02:22:02.769" v="2131" actId="1076"/>
           <ac:cxnSpMkLst>
             <pc:docMk/>
             <pc:sldMk cId="1148238646" sldId="268"/>
@@ -1641,23 +1657,47 @@
           </ac:cxnSpMkLst>
         </pc:cxnChg>
         <pc:cxnChg chg="add mod">
-          <ac:chgData name="黒沢　爽次" userId="fae486ef-0c84-45a4-a237-2d2b758b0e89" providerId="ADAL" clId="{64A8C56E-7B60-49D6-AD88-22DC8C2BC8B6}" dt="2026-06-03T03:27:23.498" v="1849" actId="14100"/>
+          <ac:chgData name="黒沢　爽次" userId="fae486ef-0c84-45a4-a237-2d2b758b0e89" providerId="ADAL" clId="{64A8C56E-7B60-49D6-AD88-22DC8C2BC8B6}" dt="2026-06-04T02:22:02.769" v="2131" actId="1076"/>
           <ac:cxnSpMkLst>
             <pc:docMk/>
             <pc:sldMk cId="1148238646" sldId="268"/>
             <ac:cxnSpMk id="27" creationId="{73912A7F-A421-43A0-A8D7-D4856DF61315}"/>
           </ac:cxnSpMkLst>
         </pc:cxnChg>
+        <pc:cxnChg chg="add del mod">
+          <ac:chgData name="黒沢　爽次" userId="fae486ef-0c84-45a4-a237-2d2b758b0e89" providerId="ADAL" clId="{64A8C56E-7B60-49D6-AD88-22DC8C2BC8B6}" dt="2026-06-04T02:22:17.729" v="2142"/>
+          <ac:cxnSpMkLst>
+            <pc:docMk/>
+            <pc:sldMk cId="1148238646" sldId="268"/>
+            <ac:cxnSpMk id="29" creationId="{6D9D62AC-D8D5-4A9C-814A-34008211018A}"/>
+          </ac:cxnSpMkLst>
+        </pc:cxnChg>
         <pc:cxnChg chg="add mod">
-          <ac:chgData name="黒沢　爽次" userId="fae486ef-0c84-45a4-a237-2d2b758b0e89" providerId="ADAL" clId="{64A8C56E-7B60-49D6-AD88-22DC8C2BC8B6}" dt="2026-06-03T03:27:14.875" v="1847" actId="14100"/>
+          <ac:chgData name="黒沢　爽次" userId="fae486ef-0c84-45a4-a237-2d2b758b0e89" providerId="ADAL" clId="{64A8C56E-7B60-49D6-AD88-22DC8C2BC8B6}" dt="2026-06-04T02:22:23.441" v="2144" actId="1076"/>
+          <ac:cxnSpMkLst>
+            <pc:docMk/>
+            <pc:sldMk cId="1148238646" sldId="268"/>
+            <ac:cxnSpMk id="31" creationId="{74A90481-B629-4F8E-B355-EEA097FE600C}"/>
+          </ac:cxnSpMkLst>
+        </pc:cxnChg>
+        <pc:cxnChg chg="add mod">
+          <ac:chgData name="黒沢　爽次" userId="fae486ef-0c84-45a4-a237-2d2b758b0e89" providerId="ADAL" clId="{64A8C56E-7B60-49D6-AD88-22DC8C2BC8B6}" dt="2026-06-04T02:22:02.769" v="2131" actId="1076"/>
           <ac:cxnSpMkLst>
             <pc:docMk/>
             <pc:sldMk cId="1148238646" sldId="268"/>
             <ac:cxnSpMk id="32" creationId="{5130DB17-3BE8-41F1-8D6E-3B1A205FC13A}"/>
           </ac:cxnSpMkLst>
         </pc:cxnChg>
+        <pc:cxnChg chg="add mod">
+          <ac:chgData name="黒沢　爽次" userId="fae486ef-0c84-45a4-a237-2d2b758b0e89" providerId="ADAL" clId="{64A8C56E-7B60-49D6-AD88-22DC8C2BC8B6}" dt="2026-06-04T02:22:23.441" v="2144" actId="1076"/>
+          <ac:cxnSpMkLst>
+            <pc:docMk/>
+            <pc:sldMk cId="1148238646" sldId="268"/>
+            <ac:cxnSpMk id="33" creationId="{E4BB76AD-1884-4703-B254-B49AA37C181D}"/>
+          </ac:cxnSpMkLst>
+        </pc:cxnChg>
         <pc:cxnChg chg="add del mod">
-          <ac:chgData name="黒沢　爽次" userId="fae486ef-0c84-45a4-a237-2d2b758b0e89" providerId="ADAL" clId="{64A8C56E-7B60-49D6-AD88-22DC8C2BC8B6}" dt="2026-06-03T03:29:17.001" v="1870" actId="21"/>
+          <ac:chgData name="黒沢　爽次" userId="fae486ef-0c84-45a4-a237-2d2b758b0e89" providerId="ADAL" clId="{64A8C56E-7B60-49D6-AD88-22DC8C2BC8B6}" dt="2026-06-04T02:22:02.769" v="2131" actId="1076"/>
           <ac:cxnSpMkLst>
             <pc:docMk/>
             <pc:sldMk cId="1148238646" sldId="268"/>
@@ -1665,7 +1705,7 @@
           </ac:cxnSpMkLst>
         </pc:cxnChg>
         <pc:cxnChg chg="add del mod">
-          <ac:chgData name="黒沢　爽次" userId="fae486ef-0c84-45a4-a237-2d2b758b0e89" providerId="ADAL" clId="{64A8C56E-7B60-49D6-AD88-22DC8C2BC8B6}" dt="2026-06-03T03:29:24.539" v="1872" actId="14100"/>
+          <ac:chgData name="黒沢　爽次" userId="fae486ef-0c84-45a4-a237-2d2b758b0e89" providerId="ADAL" clId="{64A8C56E-7B60-49D6-AD88-22DC8C2BC8B6}" dt="2026-06-04T02:22:02.769" v="2131" actId="1076"/>
           <ac:cxnSpMkLst>
             <pc:docMk/>
             <pc:sldMk cId="1148238646" sldId="268"/>
@@ -1673,7 +1713,7 @@
           </ac:cxnSpMkLst>
         </pc:cxnChg>
         <pc:cxnChg chg="add mod">
-          <ac:chgData name="黒沢　爽次" userId="fae486ef-0c84-45a4-a237-2d2b758b0e89" providerId="ADAL" clId="{64A8C56E-7B60-49D6-AD88-22DC8C2BC8B6}" dt="2026-06-03T03:30:31.172" v="1896" actId="14100"/>
+          <ac:chgData name="黒沢　爽次" userId="fae486ef-0c84-45a4-a237-2d2b758b0e89" providerId="ADAL" clId="{64A8C56E-7B60-49D6-AD88-22DC8C2BC8B6}" dt="2026-06-04T02:22:02.769" v="2131" actId="1076"/>
           <ac:cxnSpMkLst>
             <pc:docMk/>
             <pc:sldMk cId="1148238646" sldId="268"/>
@@ -1681,7 +1721,7 @@
           </ac:cxnSpMkLst>
         </pc:cxnChg>
         <pc:cxnChg chg="add mod">
-          <ac:chgData name="黒沢　爽次" userId="fae486ef-0c84-45a4-a237-2d2b758b0e89" providerId="ADAL" clId="{64A8C56E-7B60-49D6-AD88-22DC8C2BC8B6}" dt="2026-06-03T03:30:31.172" v="1896" actId="14100"/>
+          <ac:chgData name="黒沢　爽次" userId="fae486ef-0c84-45a4-a237-2d2b758b0e89" providerId="ADAL" clId="{64A8C56E-7B60-49D6-AD88-22DC8C2BC8B6}" dt="2026-06-04T02:22:02.769" v="2131" actId="1076"/>
           <ac:cxnSpMkLst>
             <pc:docMk/>
             <pc:sldMk cId="1148238646" sldId="268"/>
@@ -1689,7 +1729,7 @@
           </ac:cxnSpMkLst>
         </pc:cxnChg>
         <pc:cxnChg chg="add mod">
-          <ac:chgData name="黒沢　爽次" userId="fae486ef-0c84-45a4-a237-2d2b758b0e89" providerId="ADAL" clId="{64A8C56E-7B60-49D6-AD88-22DC8C2BC8B6}" dt="2026-06-03T03:30:49.562" v="1902" actId="14100"/>
+          <ac:chgData name="黒沢　爽次" userId="fae486ef-0c84-45a4-a237-2d2b758b0e89" providerId="ADAL" clId="{64A8C56E-7B60-49D6-AD88-22DC8C2BC8B6}" dt="2026-06-04T02:22:02.769" v="2131" actId="1076"/>
           <ac:cxnSpMkLst>
             <pc:docMk/>
             <pc:sldMk cId="1148238646" sldId="268"/>
@@ -1697,7 +1737,7 @@
           </ac:cxnSpMkLst>
         </pc:cxnChg>
         <pc:cxnChg chg="add mod">
-          <ac:chgData name="黒沢　爽次" userId="fae486ef-0c84-45a4-a237-2d2b758b0e89" providerId="ADAL" clId="{64A8C56E-7B60-49D6-AD88-22DC8C2BC8B6}" dt="2026-06-03T03:30:49.562" v="1902" actId="14100"/>
+          <ac:chgData name="黒沢　爽次" userId="fae486ef-0c84-45a4-a237-2d2b758b0e89" providerId="ADAL" clId="{64A8C56E-7B60-49D6-AD88-22DC8C2BC8B6}" dt="2026-06-04T02:22:02.769" v="2131" actId="1076"/>
           <ac:cxnSpMkLst>
             <pc:docMk/>
             <pc:sldMk cId="1148238646" sldId="268"/>
@@ -1706,7 +1746,7 @@
         </pc:cxnChg>
       </pc:sldChg>
       <pc:sldChg chg="addSp delSp modSp new mod">
-        <pc:chgData name="黒沢　爽次" userId="fae486ef-0c84-45a4-a237-2d2b758b0e89" providerId="ADAL" clId="{64A8C56E-7B60-49D6-AD88-22DC8C2BC8B6}" dt="2026-06-03T03:32:26.601" v="1965" actId="20577"/>
+        <pc:chgData name="黒沢　爽次" userId="fae486ef-0c84-45a4-a237-2d2b758b0e89" providerId="ADAL" clId="{64A8C56E-7B60-49D6-AD88-22DC8C2BC8B6}" dt="2026-06-04T02:18:48.827" v="2047" actId="20577"/>
         <pc:sldMkLst>
           <pc:docMk/>
           <pc:sldMk cId="2202017368" sldId="269"/>
@@ -1728,7 +1768,7 @@
           </ac:spMkLst>
         </pc:spChg>
         <pc:spChg chg="add mod">
-          <ac:chgData name="黒沢　爽次" userId="fae486ef-0c84-45a4-a237-2d2b758b0e89" providerId="ADAL" clId="{64A8C56E-7B60-49D6-AD88-22DC8C2BC8B6}" dt="2026-06-03T03:31:38.479" v="1915" actId="20577"/>
+          <ac:chgData name="黒沢　爽次" userId="fae486ef-0c84-45a4-a237-2d2b758b0e89" providerId="ADAL" clId="{64A8C56E-7B60-49D6-AD88-22DC8C2BC8B6}" dt="2026-06-04T02:18:48.827" v="2047" actId="20577"/>
           <ac:spMkLst>
             <pc:docMk/>
             <pc:sldMk cId="2202017368" sldId="269"/>
@@ -6391,7 +6431,7 @@
         </p:nvSpPr>
         <p:spPr>
           <a:xfrm>
-            <a:off x="5324104" y="974973"/>
+            <a:off x="5324104" y="1544989"/>
             <a:ext cx="1543792" cy="546265"/>
           </a:xfrm>
           <a:prstGeom prst="rect">
@@ -6431,7 +6471,7 @@
                   <a:schemeClr val="tx1"/>
                 </a:solidFill>
               </a:rPr>
-              <a:t>タイトル</a:t>
+              <a:t>ホーム</a:t>
             </a:r>
             <a:endParaRPr kumimoji="1" lang="en-US" altLang="ja-JP" dirty="0">
               <a:solidFill>
@@ -6457,7 +6497,7 @@
         </p:nvCxnSpPr>
         <p:spPr>
           <a:xfrm>
-            <a:off x="6012873" y="1521238"/>
+            <a:off x="6012873" y="2091254"/>
             <a:ext cx="0" cy="509443"/>
           </a:xfrm>
           <a:prstGeom prst="straightConnector1">
@@ -6496,7 +6536,7 @@
         </p:nvSpPr>
         <p:spPr>
           <a:xfrm>
-            <a:off x="5324104" y="2030681"/>
+            <a:off x="5324104" y="2600697"/>
             <a:ext cx="1543792" cy="546265"/>
           </a:xfrm>
           <a:prstGeom prst="rect">
@@ -6562,7 +6602,7 @@
         </p:nvCxnSpPr>
         <p:spPr>
           <a:xfrm flipV="1">
-            <a:off x="6224649" y="1521238"/>
+            <a:off x="6224649" y="2091254"/>
             <a:ext cx="0" cy="503321"/>
           </a:xfrm>
           <a:prstGeom prst="straightConnector1">
@@ -6603,7 +6643,7 @@
         </p:nvCxnSpPr>
         <p:spPr>
           <a:xfrm>
-            <a:off x="6096000" y="2576946"/>
+            <a:off x="6096000" y="3146962"/>
             <a:ext cx="0" cy="509443"/>
           </a:xfrm>
           <a:prstGeom prst="straightConnector1">
@@ -6642,7 +6682,7 @@
         </p:nvSpPr>
         <p:spPr>
           <a:xfrm>
-            <a:off x="5324104" y="3086389"/>
+            <a:off x="5324104" y="3656405"/>
             <a:ext cx="1543792" cy="546265"/>
           </a:xfrm>
           <a:prstGeom prst="rect">
@@ -6706,7 +6746,7 @@
         </p:nvSpPr>
         <p:spPr>
           <a:xfrm>
-            <a:off x="5324104" y="4142097"/>
+            <a:off x="5324104" y="4712113"/>
             <a:ext cx="1543792" cy="546265"/>
           </a:xfrm>
           <a:prstGeom prst="rect">
@@ -6772,7 +6812,7 @@
         </p:nvCxnSpPr>
         <p:spPr>
           <a:xfrm>
-            <a:off x="6096000" y="3632654"/>
+            <a:off x="6096000" y="4202670"/>
             <a:ext cx="0" cy="509443"/>
           </a:xfrm>
           <a:prstGeom prst="straightConnector1">
@@ -6811,7 +6851,7 @@
         </p:nvSpPr>
         <p:spPr>
           <a:xfrm>
-            <a:off x="5324104" y="5197805"/>
+            <a:off x="5324104" y="5767821"/>
             <a:ext cx="1543792" cy="546265"/>
           </a:xfrm>
           <a:prstGeom prst="rect">
@@ -6877,7 +6917,7 @@
         </p:nvCxnSpPr>
         <p:spPr>
           <a:xfrm>
-            <a:off x="6096000" y="4688362"/>
+            <a:off x="6096000" y="5258378"/>
             <a:ext cx="0" cy="509443"/>
           </a:xfrm>
           <a:prstGeom prst="straightConnector1">
@@ -6919,7 +6959,7 @@
         </p:nvCxnSpPr>
         <p:spPr>
           <a:xfrm flipV="1">
-            <a:off x="6867896" y="5470937"/>
+            <a:off x="6867896" y="6040953"/>
             <a:ext cx="423553" cy="1"/>
           </a:xfrm>
           <a:prstGeom prst="line">
@@ -6957,7 +6997,7 @@
         </p:nvCxnSpPr>
         <p:spPr>
           <a:xfrm flipV="1">
-            <a:off x="7291449" y="1248105"/>
+            <a:off x="7291449" y="1818121"/>
             <a:ext cx="0" cy="4222832"/>
           </a:xfrm>
           <a:prstGeom prst="line">
@@ -6995,7 +7035,7 @@
         </p:nvCxnSpPr>
         <p:spPr>
           <a:xfrm flipH="1">
-            <a:off x="6867897" y="1248104"/>
+            <a:off x="6867897" y="1818120"/>
             <a:ext cx="423552" cy="1"/>
           </a:xfrm>
           <a:prstGeom prst="straightConnector1">
@@ -7036,7 +7076,7 @@
         </p:nvCxnSpPr>
         <p:spPr>
           <a:xfrm flipH="1">
-            <a:off x="4225144" y="1536589"/>
+            <a:off x="4225144" y="2106605"/>
             <a:ext cx="1276597" cy="487970"/>
           </a:xfrm>
           <a:prstGeom prst="straightConnector1">
@@ -7075,7 +7115,7 @@
         </p:nvSpPr>
         <p:spPr>
           <a:xfrm>
-            <a:off x="3163786" y="2030680"/>
+            <a:off x="3163786" y="2600696"/>
             <a:ext cx="1543792" cy="546265"/>
           </a:xfrm>
           <a:prstGeom prst="rect">
@@ -7141,7 +7181,7 @@
         </p:nvCxnSpPr>
         <p:spPr>
           <a:xfrm flipV="1">
-            <a:off x="3723908" y="1389413"/>
+            <a:off x="3723908" y="1959429"/>
             <a:ext cx="1600196" cy="641267"/>
           </a:xfrm>
           <a:prstGeom prst="straightConnector1">
@@ -7180,7 +7220,7 @@
         </p:nvSpPr>
         <p:spPr>
           <a:xfrm>
-            <a:off x="984668" y="2030680"/>
+            <a:off x="984668" y="2600696"/>
             <a:ext cx="1543792" cy="546265"/>
           </a:xfrm>
           <a:prstGeom prst="rect">
@@ -7247,7 +7287,7 @@
         </p:nvCxnSpPr>
         <p:spPr>
           <a:xfrm flipH="1">
-            <a:off x="2059386" y="1248106"/>
+            <a:off x="2059386" y="1818122"/>
             <a:ext cx="3264718" cy="776453"/>
           </a:xfrm>
           <a:prstGeom prst="straightConnector1">
@@ -7288,7 +7328,7 @@
         </p:nvCxnSpPr>
         <p:spPr>
           <a:xfrm flipV="1">
-            <a:off x="1486295" y="1113930"/>
+            <a:off x="1486295" y="1683946"/>
             <a:ext cx="3837809" cy="910630"/>
           </a:xfrm>
           <a:prstGeom prst="straightConnector1">
@@ -7327,7 +7367,7 @@
         </p:nvSpPr>
         <p:spPr>
           <a:xfrm>
-            <a:off x="9828810" y="2024559"/>
+            <a:off x="9828810" y="2594575"/>
             <a:ext cx="1543792" cy="546265"/>
           </a:xfrm>
           <a:prstGeom prst="rect">
@@ -7391,7 +7431,7 @@
         </p:nvSpPr>
         <p:spPr>
           <a:xfrm>
-            <a:off x="7649692" y="2024559"/>
+            <a:off x="7649692" y="2594575"/>
             <a:ext cx="1543792" cy="546265"/>
           </a:xfrm>
           <a:prstGeom prst="rect">
@@ -7457,7 +7497,7 @@
         </p:nvCxnSpPr>
         <p:spPr>
           <a:xfrm>
-            <a:off x="6867896" y="1386226"/>
+            <a:off x="6867896" y="1956242"/>
             <a:ext cx="1723503" cy="622982"/>
           </a:xfrm>
           <a:prstGeom prst="straightConnector1">
@@ -7498,7 +7538,7 @@
         </p:nvCxnSpPr>
         <p:spPr>
           <a:xfrm flipH="1" flipV="1">
-            <a:off x="6780317" y="1536590"/>
+            <a:off x="6780317" y="2106606"/>
             <a:ext cx="1309846" cy="478740"/>
           </a:xfrm>
           <a:prstGeom prst="straightConnector1">
@@ -7539,7 +7579,7 @@
         </p:nvCxnSpPr>
         <p:spPr>
           <a:xfrm>
-            <a:off x="6807036" y="1013769"/>
+            <a:off x="6807036" y="1583785"/>
             <a:ext cx="4011385" cy="995439"/>
           </a:xfrm>
           <a:prstGeom prst="straightConnector1">
@@ -7580,8 +7620,198 @@
         </p:nvCxnSpPr>
         <p:spPr>
           <a:xfrm flipH="1" flipV="1">
-            <a:off x="6867895" y="1113930"/>
+            <a:off x="6867895" y="1683946"/>
             <a:ext cx="3558640" cy="895278"/>
+          </a:xfrm>
+          <a:prstGeom prst="straightConnector1">
+            <a:avLst/>
+          </a:prstGeom>
+          <a:ln>
+            <a:tailEnd type="triangle"/>
+          </a:ln>
+        </p:spPr>
+        <p:style>
+          <a:lnRef idx="1">
+            <a:schemeClr val="accent1"/>
+          </a:lnRef>
+          <a:fillRef idx="0">
+            <a:schemeClr val="accent1"/>
+          </a:fillRef>
+          <a:effectRef idx="0">
+            <a:schemeClr val="accent1"/>
+          </a:effectRef>
+          <a:fontRef idx="minor">
+            <a:schemeClr val="tx1"/>
+          </a:fontRef>
+        </p:style>
+      </p:cxnSp>
+      <p:sp>
+        <p:nvSpPr>
+          <p:cNvPr id="2" name="テキスト ボックス 1">
+            <a:extLst>
+              <a:ext uri="{FF2B5EF4-FFF2-40B4-BE49-F238E27FC236}">
+                <a16:creationId xmlns:a16="http://schemas.microsoft.com/office/drawing/2014/main" id="{70F26E17-31C7-4054-8EF4-1A65EEE984CE}"/>
+              </a:ext>
+            </a:extLst>
+          </p:cNvPr>
+          <p:cNvSpPr txBox="1"/>
+          <p:nvPr/>
+        </p:nvSpPr>
+        <p:spPr>
+          <a:xfrm>
+            <a:off x="7834249" y="4338914"/>
+            <a:ext cx="3222169" cy="646331"/>
+          </a:xfrm>
+          <a:prstGeom prst="rect">
+            <a:avLst/>
+          </a:prstGeom>
+          <a:noFill/>
+        </p:spPr>
+        <p:txBody>
+          <a:bodyPr wrap="square" rtlCol="0">
+            <a:spAutoFit/>
+          </a:bodyPr>
+          <a:lstStyle/>
+          <a:p>
+            <a:r>
+              <a:rPr kumimoji="1" lang="en-US" altLang="ja-JP" dirty="0"/>
+              <a:t>※</a:t>
+            </a:r>
+            <a:r>
+              <a:rPr kumimoji="1" lang="ja-JP" altLang="en-US" dirty="0"/>
+              <a:t>初めてプレイする場合のみタイトル</a:t>
+            </a:r>
+            <a:r>
+              <a:rPr kumimoji="1" lang="ja-JP" altLang="en-US"/>
+              <a:t>→練習→ホーム</a:t>
+            </a:r>
+            <a:endParaRPr kumimoji="1" lang="ja-JP" altLang="en-US" dirty="0"/>
+          </a:p>
+        </p:txBody>
+      </p:sp>
+      <p:sp>
+        <p:nvSpPr>
+          <p:cNvPr id="28" name="正方形/長方形 27">
+            <a:extLst>
+              <a:ext uri="{FF2B5EF4-FFF2-40B4-BE49-F238E27FC236}">
+                <a16:creationId xmlns:a16="http://schemas.microsoft.com/office/drawing/2014/main" id="{B1F8E11B-BBDE-4136-8FA9-9CA7EDEDB601}"/>
+              </a:ext>
+            </a:extLst>
+          </p:cNvPr>
+          <p:cNvSpPr/>
+          <p:nvPr/>
+        </p:nvSpPr>
+        <p:spPr>
+          <a:xfrm>
+            <a:off x="5324104" y="485351"/>
+            <a:ext cx="1543792" cy="546265"/>
+          </a:xfrm>
+          <a:prstGeom prst="rect">
+            <a:avLst/>
+          </a:prstGeom>
+          <a:solidFill>
+            <a:schemeClr val="accent1">
+              <a:lumMod val="20000"/>
+              <a:lumOff val="80000"/>
+            </a:schemeClr>
+          </a:solidFill>
+        </p:spPr>
+        <p:style>
+          <a:lnRef idx="2">
+            <a:schemeClr val="accent1">
+              <a:shade val="50000"/>
+            </a:schemeClr>
+          </a:lnRef>
+          <a:fillRef idx="1">
+            <a:schemeClr val="accent1"/>
+          </a:fillRef>
+          <a:effectRef idx="0">
+            <a:schemeClr val="accent1"/>
+          </a:effectRef>
+          <a:fontRef idx="minor">
+            <a:schemeClr val="lt1"/>
+          </a:fontRef>
+        </p:style>
+        <p:txBody>
+          <a:bodyPr rtlCol="0" anchor="ctr"/>
+          <a:lstStyle/>
+          <a:p>
+            <a:pPr algn="ctr"/>
+            <a:r>
+              <a:rPr kumimoji="1" lang="ja-JP" altLang="en-US" dirty="0">
+                <a:solidFill>
+                  <a:schemeClr val="tx1"/>
+                </a:solidFill>
+              </a:rPr>
+              <a:t>タイトル</a:t>
+            </a:r>
+            <a:endParaRPr kumimoji="1" lang="en-US" altLang="ja-JP" dirty="0">
+              <a:solidFill>
+                <a:schemeClr val="tx1"/>
+              </a:solidFill>
+            </a:endParaRPr>
+          </a:p>
+        </p:txBody>
+      </p:sp>
+      <p:cxnSp>
+        <p:nvCxnSpPr>
+          <p:cNvPr id="31" name="直線矢印コネクタ 30">
+            <a:extLst>
+              <a:ext uri="{FF2B5EF4-FFF2-40B4-BE49-F238E27FC236}">
+                <a16:creationId xmlns:a16="http://schemas.microsoft.com/office/drawing/2014/main" id="{74A90481-B629-4F8E-B355-EEA097FE600C}"/>
+              </a:ext>
+            </a:extLst>
+          </p:cNvPr>
+          <p:cNvCxnSpPr>
+            <a:cxnSpLocks/>
+          </p:cNvCxnSpPr>
+          <p:nvPr/>
+        </p:nvCxnSpPr>
+        <p:spPr>
+          <a:xfrm>
+            <a:off x="6012873" y="1031616"/>
+            <a:ext cx="0" cy="509443"/>
+          </a:xfrm>
+          <a:prstGeom prst="straightConnector1">
+            <a:avLst/>
+          </a:prstGeom>
+          <a:ln>
+            <a:tailEnd type="triangle"/>
+          </a:ln>
+        </p:spPr>
+        <p:style>
+          <a:lnRef idx="1">
+            <a:schemeClr val="accent1"/>
+          </a:lnRef>
+          <a:fillRef idx="0">
+            <a:schemeClr val="accent1"/>
+          </a:fillRef>
+          <a:effectRef idx="0">
+            <a:schemeClr val="accent1"/>
+          </a:effectRef>
+          <a:fontRef idx="minor">
+            <a:schemeClr val="tx1"/>
+          </a:fontRef>
+        </p:style>
+      </p:cxnSp>
+      <p:cxnSp>
+        <p:nvCxnSpPr>
+          <p:cNvPr id="33" name="直線矢印コネクタ 32">
+            <a:extLst>
+              <a:ext uri="{FF2B5EF4-FFF2-40B4-BE49-F238E27FC236}">
+                <a16:creationId xmlns:a16="http://schemas.microsoft.com/office/drawing/2014/main" id="{E4BB76AD-1884-4703-B254-B49AA37C181D}"/>
+              </a:ext>
+            </a:extLst>
+          </p:cNvPr>
+          <p:cNvCxnSpPr>
+            <a:cxnSpLocks/>
+          </p:cNvCxnSpPr>
+          <p:nvPr/>
+        </p:nvCxnSpPr>
+        <p:spPr>
+          <a:xfrm flipV="1">
+            <a:off x="6224649" y="1031616"/>
+            <a:ext cx="0" cy="503321"/>
           </a:xfrm>
           <a:prstGeom prst="straightConnector1">
             <a:avLst/>

--- a/仕様書/シーン.pptx
+++ b/仕様書/シーン.pptx
@@ -130,7 +130,7 @@
   <pc:docChgLst>
     <pc:chgData name="黒沢　爽次" userId="fae486ef-0c84-45a4-a237-2d2b758b0e89" providerId="ADAL" clId="{64A8C56E-7B60-49D6-AD88-22DC8C2BC8B6}"/>
     <pc:docChg chg="undo custSel addSld modSld sldOrd">
-      <pc:chgData name="黒沢　爽次" userId="fae486ef-0c84-45a4-a237-2d2b758b0e89" providerId="ADAL" clId="{64A8C56E-7B60-49D6-AD88-22DC8C2BC8B6}" dt="2026-06-04T02:22:41.352" v="2152" actId="20577"/>
+      <pc:chgData name="黒沢　爽次" userId="fae486ef-0c84-45a4-a237-2d2b758b0e89" providerId="ADAL" clId="{64A8C56E-7B60-49D6-AD88-22DC8C2BC8B6}" dt="2026-06-04T02:51:52.189" v="2163" actId="20577"/>
       <pc:docMkLst>
         <pc:docMk/>
       </pc:docMkLst>
@@ -190,7 +190,7 @@
         </pc:spChg>
       </pc:sldChg>
       <pc:sldChg chg="addSp delSp modSp new mod">
-        <pc:chgData name="黒沢　爽次" userId="fae486ef-0c84-45a4-a237-2d2b758b0e89" providerId="ADAL" clId="{64A8C56E-7B60-49D6-AD88-22DC8C2BC8B6}" dt="2026-06-04T02:14:24.287" v="2031" actId="20577"/>
+        <pc:chgData name="黒沢　爽次" userId="fae486ef-0c84-45a4-a237-2d2b758b0e89" providerId="ADAL" clId="{64A8C56E-7B60-49D6-AD88-22DC8C2BC8B6}" dt="2026-06-04T02:51:52.189" v="2163" actId="20577"/>
         <pc:sldMkLst>
           <pc:docMk/>
           <pc:sldMk cId="3471022167" sldId="257"/>
@@ -228,7 +228,7 @@
           </ac:spMkLst>
         </pc:spChg>
         <pc:spChg chg="add mod">
-          <ac:chgData name="黒沢　爽次" userId="fae486ef-0c84-45a4-a237-2d2b758b0e89" providerId="ADAL" clId="{64A8C56E-7B60-49D6-AD88-22DC8C2BC8B6}" dt="2026-06-04T02:14:24.287" v="2031" actId="20577"/>
+          <ac:chgData name="黒沢　爽次" userId="fae486ef-0c84-45a4-a237-2d2b758b0e89" providerId="ADAL" clId="{64A8C56E-7B60-49D6-AD88-22DC8C2BC8B6}" dt="2026-06-04T02:51:52.189" v="2163" actId="20577"/>
           <ac:spMkLst>
             <pc:docMk/>
             <pc:sldMk cId="3471022167" sldId="257"/>
@@ -8001,16 +8001,13 @@
           <a:p>
             <a:pPr algn="ctr"/>
             <a:r>
-              <a:rPr kumimoji="1" lang="en-US" altLang="ja-JP" dirty="0">
+              <a:rPr lang="en-US" altLang="ja-JP" dirty="0" err="1">
                 <a:solidFill>
                   <a:schemeClr val="tx1"/>
                 </a:solidFill>
               </a:rPr>
-              <a:t>Guess It</a:t>
+              <a:t>Rupters</a:t>
             </a:r>
-          </a:p>
-          <a:p>
-            <a:pPr algn="ctr"/>
             <a:r>
               <a:rPr lang="ja-JP" altLang="en-US" dirty="0">
                 <a:solidFill>
